--- a/モデリング/ポスター類/プレゼン.pptx
+++ b/モデリング/ポスター類/プレゼン.pptx
@@ -4,9 +4,13 @@
   <p:sldMasterIdLst>
     <p:sldMasterId id="2147483648" r:id="rId1"/>
   </p:sldMasterIdLst>
+  <p:notesMasterIdLst>
+    <p:notesMasterId r:id="rId5"/>
+  </p:notesMasterIdLst>
   <p:sldIdLst>
     <p:sldId id="256" r:id="rId2"/>
     <p:sldId id="257" r:id="rId3"/>
+    <p:sldId id="258" r:id="rId4"/>
   </p:sldIdLst>
   <p:sldSz cx="12192000" cy="6858000"/>
   <p:notesSz cx="6858000" cy="9144000"/>
@@ -113,6 +117,440 @@
 </p:presentation>
 </file>
 
+<file path=ppt/notesMasters/notesMaster1.xml><?xml version="1.0" encoding="utf-8"?>
+<p:notesMaster xmlns:a="http://schemas.openxmlformats.org/drawingml/2006/main" xmlns:r="http://schemas.openxmlformats.org/officeDocument/2006/relationships" xmlns:p="http://schemas.openxmlformats.org/presentationml/2006/main">
+  <p:cSld>
+    <p:bg>
+      <p:bgRef idx="1001">
+        <a:schemeClr val="bg1"/>
+      </p:bgRef>
+    </p:bg>
+    <p:spTree>
+      <p:nvGrpSpPr>
+        <p:cNvPr id="1" name=""/>
+        <p:cNvGrpSpPr/>
+        <p:nvPr/>
+      </p:nvGrpSpPr>
+      <p:grpSpPr>
+        <a:xfrm>
+          <a:off x="0" y="0"/>
+          <a:ext cx="0" cy="0"/>
+          <a:chOff x="0" y="0"/>
+          <a:chExt cx="0" cy="0"/>
+        </a:xfrm>
+      </p:grpSpPr>
+      <p:sp>
+        <p:nvSpPr>
+          <p:cNvPr id="2" name="Header Placeholder 1"/>
+          <p:cNvSpPr>
+            <a:spLocks noGrp="1"/>
+          </p:cNvSpPr>
+          <p:nvPr>
+            <p:ph type="hdr" sz="quarter"/>
+          </p:nvPr>
+        </p:nvSpPr>
+        <p:spPr>
+          <a:xfrm>
+            <a:off x="0" y="0"/>
+            <a:ext cx="2971800" cy="458788"/>
+          </a:xfrm>
+          <a:prstGeom prst="rect">
+            <a:avLst/>
+          </a:prstGeom>
+        </p:spPr>
+        <p:txBody>
+          <a:bodyPr vert="horz" lIns="91440" tIns="45720" rIns="91440" bIns="45720" rtlCol="0"/>
+          <a:lstStyle>
+            <a:lvl1pPr algn="l">
+              <a:defRPr sz="1200"/>
+            </a:lvl1pPr>
+          </a:lstStyle>
+          <a:p>
+            <a:endParaRPr kumimoji="1" lang="ja-JP" altLang="en-US"/>
+          </a:p>
+        </p:txBody>
+      </p:sp>
+      <p:sp>
+        <p:nvSpPr>
+          <p:cNvPr id="3" name="Date Placeholder 2"/>
+          <p:cNvSpPr>
+            <a:spLocks noGrp="1"/>
+          </p:cNvSpPr>
+          <p:nvPr>
+            <p:ph type="dt" idx="1"/>
+          </p:nvPr>
+        </p:nvSpPr>
+        <p:spPr>
+          <a:xfrm>
+            <a:off x="3884613" y="0"/>
+            <a:ext cx="2971800" cy="458788"/>
+          </a:xfrm>
+          <a:prstGeom prst="rect">
+            <a:avLst/>
+          </a:prstGeom>
+        </p:spPr>
+        <p:txBody>
+          <a:bodyPr vert="horz" lIns="91440" tIns="45720" rIns="91440" bIns="45720" rtlCol="0"/>
+          <a:lstStyle>
+            <a:lvl1pPr algn="r">
+              <a:defRPr sz="1200"/>
+            </a:lvl1pPr>
+          </a:lstStyle>
+          <a:p>
+            <a:fld id="{D67AA051-A42D-4CB0-8761-895C68CE1059}" type="datetimeFigureOut">
+              <a:rPr kumimoji="1" lang="ja-JP" altLang="en-US" smtClean="0"/>
+              <a:t>2025/8/11</a:t>
+            </a:fld>
+            <a:endParaRPr kumimoji="1" lang="ja-JP" altLang="en-US"/>
+          </a:p>
+        </p:txBody>
+      </p:sp>
+      <p:sp>
+        <p:nvSpPr>
+          <p:cNvPr id="4" name="Slide Image Placeholder 3"/>
+          <p:cNvSpPr>
+            <a:spLocks noGrp="1" noRot="1" noChangeAspect="1"/>
+          </p:cNvSpPr>
+          <p:nvPr>
+            <p:ph type="sldImg" idx="2"/>
+          </p:nvPr>
+        </p:nvSpPr>
+        <p:spPr>
+          <a:xfrm>
+            <a:off x="685800" y="1143000"/>
+            <a:ext cx="5486400" cy="3086100"/>
+          </a:xfrm>
+          <a:prstGeom prst="rect">
+            <a:avLst/>
+          </a:prstGeom>
+          <a:noFill/>
+          <a:ln w="12700">
+            <a:solidFill>
+              <a:prstClr val="black"/>
+            </a:solidFill>
+          </a:ln>
+        </p:spPr>
+        <p:txBody>
+          <a:bodyPr vert="horz" lIns="91440" tIns="45720" rIns="91440" bIns="45720" rtlCol="0" anchor="ctr"/>
+          <a:lstStyle/>
+          <a:p>
+            <a:endParaRPr lang="ja-JP" altLang="en-US"/>
+          </a:p>
+        </p:txBody>
+      </p:sp>
+      <p:sp>
+        <p:nvSpPr>
+          <p:cNvPr id="5" name="Notes Placeholder 4"/>
+          <p:cNvSpPr>
+            <a:spLocks noGrp="1"/>
+          </p:cNvSpPr>
+          <p:nvPr>
+            <p:ph type="body" sz="quarter" idx="3"/>
+          </p:nvPr>
+        </p:nvSpPr>
+        <p:spPr>
+          <a:xfrm>
+            <a:off x="685800" y="4400550"/>
+            <a:ext cx="5486400" cy="3600450"/>
+          </a:xfrm>
+          <a:prstGeom prst="rect">
+            <a:avLst/>
+          </a:prstGeom>
+        </p:spPr>
+        <p:txBody>
+          <a:bodyPr vert="horz" lIns="91440" tIns="45720" rIns="91440" bIns="45720" rtlCol="0"/>
+          <a:lstStyle/>
+          <a:p>
+            <a:pPr lvl="0"/>
+            <a:r>
+              <a:rPr kumimoji="1" lang="en-US" altLang="ja-JP"/>
+              <a:t>Click to edit Master text styles</a:t>
+            </a:r>
+          </a:p>
+          <a:p>
+            <a:pPr lvl="1"/>
+            <a:r>
+              <a:rPr kumimoji="1" lang="en-US" altLang="ja-JP"/>
+              <a:t>Second level</a:t>
+            </a:r>
+          </a:p>
+          <a:p>
+            <a:pPr lvl="2"/>
+            <a:r>
+              <a:rPr kumimoji="1" lang="en-US" altLang="ja-JP"/>
+              <a:t>Third level</a:t>
+            </a:r>
+          </a:p>
+          <a:p>
+            <a:pPr lvl="3"/>
+            <a:r>
+              <a:rPr kumimoji="1" lang="en-US" altLang="ja-JP"/>
+              <a:t>Fourth level</a:t>
+            </a:r>
+          </a:p>
+          <a:p>
+            <a:pPr lvl="4"/>
+            <a:r>
+              <a:rPr kumimoji="1" lang="en-US" altLang="ja-JP"/>
+              <a:t>Fifth level</a:t>
+            </a:r>
+            <a:endParaRPr kumimoji="1" lang="ja-JP" altLang="en-US"/>
+          </a:p>
+        </p:txBody>
+      </p:sp>
+      <p:sp>
+        <p:nvSpPr>
+          <p:cNvPr id="6" name="Footer Placeholder 5"/>
+          <p:cNvSpPr>
+            <a:spLocks noGrp="1"/>
+          </p:cNvSpPr>
+          <p:nvPr>
+            <p:ph type="ftr" sz="quarter" idx="4"/>
+          </p:nvPr>
+        </p:nvSpPr>
+        <p:spPr>
+          <a:xfrm>
+            <a:off x="0" y="8685213"/>
+            <a:ext cx="2971800" cy="458787"/>
+          </a:xfrm>
+          <a:prstGeom prst="rect">
+            <a:avLst/>
+          </a:prstGeom>
+        </p:spPr>
+        <p:txBody>
+          <a:bodyPr vert="horz" lIns="91440" tIns="45720" rIns="91440" bIns="45720" rtlCol="0" anchor="b"/>
+          <a:lstStyle>
+            <a:lvl1pPr algn="l">
+              <a:defRPr sz="1200"/>
+            </a:lvl1pPr>
+          </a:lstStyle>
+          <a:p>
+            <a:endParaRPr kumimoji="1" lang="ja-JP" altLang="en-US"/>
+          </a:p>
+        </p:txBody>
+      </p:sp>
+      <p:sp>
+        <p:nvSpPr>
+          <p:cNvPr id="7" name="Slide Number Placeholder 6"/>
+          <p:cNvSpPr>
+            <a:spLocks noGrp="1"/>
+          </p:cNvSpPr>
+          <p:nvPr>
+            <p:ph type="sldNum" sz="quarter" idx="5"/>
+          </p:nvPr>
+        </p:nvSpPr>
+        <p:spPr>
+          <a:xfrm>
+            <a:off x="3884613" y="8685213"/>
+            <a:ext cx="2971800" cy="458787"/>
+          </a:xfrm>
+          <a:prstGeom prst="rect">
+            <a:avLst/>
+          </a:prstGeom>
+        </p:spPr>
+        <p:txBody>
+          <a:bodyPr vert="horz" lIns="91440" tIns="45720" rIns="91440" bIns="45720" rtlCol="0" anchor="b"/>
+          <a:lstStyle>
+            <a:lvl1pPr algn="r">
+              <a:defRPr sz="1200"/>
+            </a:lvl1pPr>
+          </a:lstStyle>
+          <a:p>
+            <a:fld id="{41B6E5A2-D60E-4115-9E45-83C81AD3BEC2}" type="slidenum">
+              <a:rPr kumimoji="1" lang="ja-JP" altLang="en-US" smtClean="0"/>
+              <a:t>‹#›</a:t>
+            </a:fld>
+            <a:endParaRPr kumimoji="1" lang="ja-JP" altLang="en-US"/>
+          </a:p>
+        </p:txBody>
+      </p:sp>
+    </p:spTree>
+    <p:extLst>
+      <p:ext uri="{BB962C8B-B14F-4D97-AF65-F5344CB8AC3E}">
+        <p14:creationId xmlns:p14="http://schemas.microsoft.com/office/powerpoint/2010/main" val="3656008222"/>
+      </p:ext>
+    </p:extLst>
+  </p:cSld>
+  <p:clrMap bg1="lt1" tx1="dk1" bg2="lt2" tx2="dk2" accent1="accent1" accent2="accent2" accent3="accent3" accent4="accent4" accent5="accent5" accent6="accent6" hlink="hlink" folHlink="folHlink"/>
+  <p:notesStyle>
+    <a:lvl1pPr marL="0" algn="l" defTabSz="914400" rtl="0" eaLnBrk="1" latinLnBrk="0" hangingPunct="1">
+      <a:defRPr kumimoji="1" sz="1200" kern="1200">
+        <a:solidFill>
+          <a:schemeClr val="tx1"/>
+        </a:solidFill>
+        <a:latin typeface="+mn-lt"/>
+        <a:ea typeface="+mn-ea"/>
+        <a:cs typeface="+mn-cs"/>
+      </a:defRPr>
+    </a:lvl1pPr>
+    <a:lvl2pPr marL="457200" algn="l" defTabSz="914400" rtl="0" eaLnBrk="1" latinLnBrk="0" hangingPunct="1">
+      <a:defRPr kumimoji="1" sz="1200" kern="1200">
+        <a:solidFill>
+          <a:schemeClr val="tx1"/>
+        </a:solidFill>
+        <a:latin typeface="+mn-lt"/>
+        <a:ea typeface="+mn-ea"/>
+        <a:cs typeface="+mn-cs"/>
+      </a:defRPr>
+    </a:lvl2pPr>
+    <a:lvl3pPr marL="914400" algn="l" defTabSz="914400" rtl="0" eaLnBrk="1" latinLnBrk="0" hangingPunct="1">
+      <a:defRPr kumimoji="1" sz="1200" kern="1200">
+        <a:solidFill>
+          <a:schemeClr val="tx1"/>
+        </a:solidFill>
+        <a:latin typeface="+mn-lt"/>
+        <a:ea typeface="+mn-ea"/>
+        <a:cs typeface="+mn-cs"/>
+      </a:defRPr>
+    </a:lvl3pPr>
+    <a:lvl4pPr marL="1371600" algn="l" defTabSz="914400" rtl="0" eaLnBrk="1" latinLnBrk="0" hangingPunct="1">
+      <a:defRPr kumimoji="1" sz="1200" kern="1200">
+        <a:solidFill>
+          <a:schemeClr val="tx1"/>
+        </a:solidFill>
+        <a:latin typeface="+mn-lt"/>
+        <a:ea typeface="+mn-ea"/>
+        <a:cs typeface="+mn-cs"/>
+      </a:defRPr>
+    </a:lvl4pPr>
+    <a:lvl5pPr marL="1828800" algn="l" defTabSz="914400" rtl="0" eaLnBrk="1" latinLnBrk="0" hangingPunct="1">
+      <a:defRPr kumimoji="1" sz="1200" kern="1200">
+        <a:solidFill>
+          <a:schemeClr val="tx1"/>
+        </a:solidFill>
+        <a:latin typeface="+mn-lt"/>
+        <a:ea typeface="+mn-ea"/>
+        <a:cs typeface="+mn-cs"/>
+      </a:defRPr>
+    </a:lvl5pPr>
+    <a:lvl6pPr marL="2286000" algn="l" defTabSz="914400" rtl="0" eaLnBrk="1" latinLnBrk="0" hangingPunct="1">
+      <a:defRPr kumimoji="1" sz="1200" kern="1200">
+        <a:solidFill>
+          <a:schemeClr val="tx1"/>
+        </a:solidFill>
+        <a:latin typeface="+mn-lt"/>
+        <a:ea typeface="+mn-ea"/>
+        <a:cs typeface="+mn-cs"/>
+      </a:defRPr>
+    </a:lvl6pPr>
+    <a:lvl7pPr marL="2743200" algn="l" defTabSz="914400" rtl="0" eaLnBrk="1" latinLnBrk="0" hangingPunct="1">
+      <a:defRPr kumimoji="1" sz="1200" kern="1200">
+        <a:solidFill>
+          <a:schemeClr val="tx1"/>
+        </a:solidFill>
+        <a:latin typeface="+mn-lt"/>
+        <a:ea typeface="+mn-ea"/>
+        <a:cs typeface="+mn-cs"/>
+      </a:defRPr>
+    </a:lvl7pPr>
+    <a:lvl8pPr marL="3200400" algn="l" defTabSz="914400" rtl="0" eaLnBrk="1" latinLnBrk="0" hangingPunct="1">
+      <a:defRPr kumimoji="1" sz="1200" kern="1200">
+        <a:solidFill>
+          <a:schemeClr val="tx1"/>
+        </a:solidFill>
+        <a:latin typeface="+mn-lt"/>
+        <a:ea typeface="+mn-ea"/>
+        <a:cs typeface="+mn-cs"/>
+      </a:defRPr>
+    </a:lvl8pPr>
+    <a:lvl9pPr marL="3657600" algn="l" defTabSz="914400" rtl="0" eaLnBrk="1" latinLnBrk="0" hangingPunct="1">
+      <a:defRPr kumimoji="1" sz="1200" kern="1200">
+        <a:solidFill>
+          <a:schemeClr val="tx1"/>
+        </a:solidFill>
+        <a:latin typeface="+mn-lt"/>
+        <a:ea typeface="+mn-ea"/>
+        <a:cs typeface="+mn-cs"/>
+      </a:defRPr>
+    </a:lvl9pPr>
+  </p:notesStyle>
+</p:notesMaster>
+</file>
+
+<file path=ppt/notesSlides/notesSlide1.xml><?xml version="1.0" encoding="utf-8"?>
+<p:notes xmlns:a="http://schemas.openxmlformats.org/drawingml/2006/main" xmlns:r="http://schemas.openxmlformats.org/officeDocument/2006/relationships" xmlns:p="http://schemas.openxmlformats.org/presentationml/2006/main">
+  <p:cSld>
+    <p:spTree>
+      <p:nvGrpSpPr>
+        <p:cNvPr id="1" name=""/>
+        <p:cNvGrpSpPr/>
+        <p:nvPr/>
+      </p:nvGrpSpPr>
+      <p:grpSpPr>
+        <a:xfrm>
+          <a:off x="0" y="0"/>
+          <a:ext cx="0" cy="0"/>
+          <a:chOff x="0" y="0"/>
+          <a:chExt cx="0" cy="0"/>
+        </a:xfrm>
+      </p:grpSpPr>
+      <p:sp>
+        <p:nvSpPr>
+          <p:cNvPr id="2" name="Slide Image Placeholder 1"/>
+          <p:cNvSpPr>
+            <a:spLocks noGrp="1" noRot="1" noChangeAspect="1"/>
+          </p:cNvSpPr>
+          <p:nvPr>
+            <p:ph type="sldImg"/>
+          </p:nvPr>
+        </p:nvSpPr>
+        <p:spPr/>
+      </p:sp>
+      <p:sp>
+        <p:nvSpPr>
+          <p:cNvPr id="3" name="Notes Placeholder 2"/>
+          <p:cNvSpPr>
+            <a:spLocks noGrp="1"/>
+          </p:cNvSpPr>
+          <p:nvPr>
+            <p:ph type="body" idx="1"/>
+          </p:nvPr>
+        </p:nvSpPr>
+        <p:spPr/>
+        <p:txBody>
+          <a:bodyPr/>
+          <a:lstStyle/>
+          <a:p>
+            <a:endParaRPr kumimoji="1" lang="ja-JP" altLang="en-US" dirty="0"/>
+          </a:p>
+        </p:txBody>
+      </p:sp>
+      <p:sp>
+        <p:nvSpPr>
+          <p:cNvPr id="4" name="Slide Number Placeholder 3"/>
+          <p:cNvSpPr>
+            <a:spLocks noGrp="1"/>
+          </p:cNvSpPr>
+          <p:nvPr>
+            <p:ph type="sldNum" sz="quarter" idx="5"/>
+          </p:nvPr>
+        </p:nvSpPr>
+        <p:spPr/>
+        <p:txBody>
+          <a:bodyPr/>
+          <a:lstStyle/>
+          <a:p>
+            <a:fld id="{41B6E5A2-D60E-4115-9E45-83C81AD3BEC2}" type="slidenum">
+              <a:rPr kumimoji="1" lang="ja-JP" altLang="en-US" smtClean="0"/>
+              <a:t>2</a:t>
+            </a:fld>
+            <a:endParaRPr kumimoji="1" lang="ja-JP" altLang="en-US"/>
+          </a:p>
+        </p:txBody>
+      </p:sp>
+    </p:spTree>
+    <p:extLst>
+      <p:ext uri="{BB962C8B-B14F-4D97-AF65-F5344CB8AC3E}">
+        <p14:creationId xmlns:p14="http://schemas.microsoft.com/office/powerpoint/2010/main" val="143602458"/>
+      </p:ext>
+    </p:extLst>
+  </p:cSld>
+  <p:clrMapOvr>
+    <a:masterClrMapping/>
+  </p:clrMapOvr>
+</p:notes>
+</file>
+
 <file path=ppt/slideLayouts/slideLayout1.xml><?xml version="1.0" encoding="utf-8"?>
 <p:sldLayout xmlns:a="http://schemas.openxmlformats.org/drawingml/2006/main" xmlns:r="http://schemas.openxmlformats.org/officeDocument/2006/relationships" xmlns:p="http://schemas.openxmlformats.org/presentationml/2006/main" type="title" preserve="1">
   <p:cSld name="タイトル スライド">
@@ -260,7 +698,7 @@
           <a:p>
             <a:fld id="{D30F02CC-316E-46E0-B601-BFB73628A698}" type="datetimeFigureOut">
               <a:rPr kumimoji="1" lang="ja-JP" altLang="en-US" smtClean="0"/>
-              <a:t>2024/1/18</a:t>
+              <a:t>2025/8/11</a:t>
             </a:fld>
             <a:endParaRPr kumimoji="1" lang="ja-JP" altLang="en-US"/>
           </a:p>
@@ -490,7 +928,7 @@
           <a:p>
             <a:fld id="{D30F02CC-316E-46E0-B601-BFB73628A698}" type="datetimeFigureOut">
               <a:rPr kumimoji="1" lang="ja-JP" altLang="en-US" smtClean="0"/>
-              <a:t>2024/1/18</a:t>
+              <a:t>2025/8/11</a:t>
             </a:fld>
             <a:endParaRPr kumimoji="1" lang="ja-JP" altLang="en-US"/>
           </a:p>
@@ -730,7 +1168,7 @@
           <a:p>
             <a:fld id="{D30F02CC-316E-46E0-B601-BFB73628A698}" type="datetimeFigureOut">
               <a:rPr kumimoji="1" lang="ja-JP" altLang="en-US" smtClean="0"/>
-              <a:t>2024/1/18</a:t>
+              <a:t>2025/8/11</a:t>
             </a:fld>
             <a:endParaRPr kumimoji="1" lang="ja-JP" altLang="en-US"/>
           </a:p>
@@ -960,7 +1398,7 @@
           <a:p>
             <a:fld id="{D30F02CC-316E-46E0-B601-BFB73628A698}" type="datetimeFigureOut">
               <a:rPr kumimoji="1" lang="ja-JP" altLang="en-US" smtClean="0"/>
-              <a:t>2024/1/18</a:t>
+              <a:t>2025/8/11</a:t>
             </a:fld>
             <a:endParaRPr kumimoji="1" lang="ja-JP" altLang="en-US"/>
           </a:p>
@@ -1235,7 +1673,7 @@
           <a:p>
             <a:fld id="{D30F02CC-316E-46E0-B601-BFB73628A698}" type="datetimeFigureOut">
               <a:rPr kumimoji="1" lang="ja-JP" altLang="en-US" smtClean="0"/>
-              <a:t>2024/1/18</a:t>
+              <a:t>2025/8/11</a:t>
             </a:fld>
             <a:endParaRPr kumimoji="1" lang="ja-JP" altLang="en-US"/>
           </a:p>
@@ -1564,7 +2002,7 @@
           <a:p>
             <a:fld id="{D30F02CC-316E-46E0-B601-BFB73628A698}" type="datetimeFigureOut">
               <a:rPr kumimoji="1" lang="ja-JP" altLang="en-US" smtClean="0"/>
-              <a:t>2024/1/18</a:t>
+              <a:t>2025/8/11</a:t>
             </a:fld>
             <a:endParaRPr kumimoji="1" lang="ja-JP" altLang="en-US"/>
           </a:p>
@@ -2040,7 +2478,7 @@
           <a:p>
             <a:fld id="{D30F02CC-316E-46E0-B601-BFB73628A698}" type="datetimeFigureOut">
               <a:rPr kumimoji="1" lang="ja-JP" altLang="en-US" smtClean="0"/>
-              <a:t>2024/1/18</a:t>
+              <a:t>2025/8/11</a:t>
             </a:fld>
             <a:endParaRPr kumimoji="1" lang="ja-JP" altLang="en-US"/>
           </a:p>
@@ -2181,7 +2619,7 @@
           <a:p>
             <a:fld id="{D30F02CC-316E-46E0-B601-BFB73628A698}" type="datetimeFigureOut">
               <a:rPr kumimoji="1" lang="ja-JP" altLang="en-US" smtClean="0"/>
-              <a:t>2024/1/18</a:t>
+              <a:t>2025/8/11</a:t>
             </a:fld>
             <a:endParaRPr kumimoji="1" lang="ja-JP" altLang="en-US"/>
           </a:p>
@@ -2294,7 +2732,7 @@
           <a:p>
             <a:fld id="{D30F02CC-316E-46E0-B601-BFB73628A698}" type="datetimeFigureOut">
               <a:rPr kumimoji="1" lang="ja-JP" altLang="en-US" smtClean="0"/>
-              <a:t>2024/1/18</a:t>
+              <a:t>2025/8/11</a:t>
             </a:fld>
             <a:endParaRPr kumimoji="1" lang="ja-JP" altLang="en-US"/>
           </a:p>
@@ -2637,7 +3075,7 @@
           <a:p>
             <a:fld id="{D30F02CC-316E-46E0-B601-BFB73628A698}" type="datetimeFigureOut">
               <a:rPr kumimoji="1" lang="ja-JP" altLang="en-US" smtClean="0"/>
-              <a:t>2024/1/18</a:t>
+              <a:t>2025/8/11</a:t>
             </a:fld>
             <a:endParaRPr kumimoji="1" lang="ja-JP" altLang="en-US"/>
           </a:p>
@@ -2925,7 +3363,7 @@
           <a:p>
             <a:fld id="{D30F02CC-316E-46E0-B601-BFB73628A698}" type="datetimeFigureOut">
               <a:rPr kumimoji="1" lang="ja-JP" altLang="en-US" smtClean="0"/>
-              <a:t>2024/1/18</a:t>
+              <a:t>2025/8/11</a:t>
             </a:fld>
             <a:endParaRPr kumimoji="1" lang="ja-JP" altLang="en-US"/>
           </a:p>
@@ -3198,7 +3636,7 @@
           <a:p>
             <a:fld id="{D30F02CC-316E-46E0-B601-BFB73628A698}" type="datetimeFigureOut">
               <a:rPr kumimoji="1" lang="ja-JP" altLang="en-US" smtClean="0"/>
-              <a:t>2024/1/18</a:t>
+              <a:t>2025/8/11</a:t>
             </a:fld>
             <a:endParaRPr kumimoji="1" lang="ja-JP" altLang="en-US"/>
           </a:p>
@@ -4447,10 +4885,1198 @@
           <a:chExt cx="0" cy="0"/>
         </a:xfrm>
       </p:grpSpPr>
+      <p:pic>
+        <p:nvPicPr>
+          <p:cNvPr id="3" name="Picture 2">
+            <a:extLst>
+              <a:ext uri="{FF2B5EF4-FFF2-40B4-BE49-F238E27FC236}">
+                <a16:creationId xmlns:a16="http://schemas.microsoft.com/office/drawing/2014/main" id="{007AE498-219C-DED3-6EDE-7CDBC77A8153}"/>
+              </a:ext>
+            </a:extLst>
+          </p:cNvPr>
+          <p:cNvPicPr>
+            <a:picLocks noChangeAspect="1"/>
+          </p:cNvPicPr>
+          <p:nvPr/>
+        </p:nvPicPr>
+        <p:blipFill>
+          <a:blip r:embed="rId3">
+            <a:extLst>
+              <a:ext uri="{28A0092B-C50C-407E-A947-70E740481C1C}">
+                <a14:useLocalDpi xmlns:a14="http://schemas.microsoft.com/office/drawing/2010/main" val="0"/>
+              </a:ext>
+            </a:extLst>
+          </a:blip>
+          <a:stretch>
+            <a:fillRect/>
+          </a:stretch>
+        </p:blipFill>
+        <p:spPr>
+          <a:xfrm>
+            <a:off x="1729430" y="2292856"/>
+            <a:ext cx="1759062" cy="2438740"/>
+          </a:xfrm>
+          <a:prstGeom prst="rect">
+            <a:avLst/>
+          </a:prstGeom>
+        </p:spPr>
+      </p:pic>
+      <p:sp>
+        <p:nvSpPr>
+          <p:cNvPr id="6" name="Rectangle 5">
+            <a:extLst>
+              <a:ext uri="{FF2B5EF4-FFF2-40B4-BE49-F238E27FC236}">
+                <a16:creationId xmlns:a16="http://schemas.microsoft.com/office/drawing/2014/main" id="{55009837-A9C3-663B-9454-8A2CF738001A}"/>
+              </a:ext>
+            </a:extLst>
+          </p:cNvPr>
+          <p:cNvSpPr/>
+          <p:nvPr/>
+        </p:nvSpPr>
+        <p:spPr>
+          <a:xfrm>
+            <a:off x="1760220" y="2491740"/>
+            <a:ext cx="1623060" cy="1249680"/>
+          </a:xfrm>
+          <a:prstGeom prst="rect">
+            <a:avLst/>
+          </a:prstGeom>
+          <a:solidFill>
+            <a:srgbClr val="B0A859"/>
+          </a:solidFill>
+          <a:ln>
+            <a:noFill/>
+          </a:ln>
+        </p:spPr>
+        <p:style>
+          <a:lnRef idx="2">
+            <a:schemeClr val="accent1">
+              <a:shade val="15000"/>
+            </a:schemeClr>
+          </a:lnRef>
+          <a:fillRef idx="1">
+            <a:schemeClr val="accent1"/>
+          </a:fillRef>
+          <a:effectRef idx="0">
+            <a:schemeClr val="accent1"/>
+          </a:effectRef>
+          <a:fontRef idx="minor">
+            <a:schemeClr val="lt1"/>
+          </a:fontRef>
+        </p:style>
+        <p:txBody>
+          <a:bodyPr rtlCol="0" anchor="ctr"/>
+          <a:lstStyle/>
+          <a:p>
+            <a:pPr algn="ctr"/>
+            <a:endParaRPr kumimoji="1" lang="ja-JP" altLang="en-US"/>
+          </a:p>
+        </p:txBody>
+      </p:sp>
+      <p:sp>
+        <p:nvSpPr>
+          <p:cNvPr id="5" name="TextBox 4">
+            <a:extLst>
+              <a:ext uri="{FF2B5EF4-FFF2-40B4-BE49-F238E27FC236}">
+                <a16:creationId xmlns:a16="http://schemas.microsoft.com/office/drawing/2014/main" id="{DED91A15-EB40-DEC6-100B-195A028ACADF}"/>
+              </a:ext>
+            </a:extLst>
+          </p:cNvPr>
+          <p:cNvSpPr txBox="1"/>
+          <p:nvPr/>
+        </p:nvSpPr>
+        <p:spPr>
+          <a:xfrm>
+            <a:off x="3583742" y="2311133"/>
+            <a:ext cx="1807408" cy="1200329"/>
+          </a:xfrm>
+          <a:prstGeom prst="rect">
+            <a:avLst/>
+          </a:prstGeom>
+          <a:noFill/>
+        </p:spPr>
+        <p:txBody>
+          <a:bodyPr wrap="square" rtlCol="0">
+            <a:spAutoFit/>
+          </a:bodyPr>
+          <a:lstStyle/>
+          <a:p>
+            <a:r>
+              <a:rPr lang="ja-JP" altLang="en-US" b="1" dirty="0"/>
+              <a:t>目の前の人を</a:t>
+            </a:r>
+            <a:endParaRPr lang="en-US" altLang="ja-JP" b="1" dirty="0"/>
+          </a:p>
+          <a:p>
+            <a:r>
+              <a:rPr lang="ja-JP" altLang="en-US" b="1" dirty="0"/>
+              <a:t>愛すより、</a:t>
+            </a:r>
+            <a:endParaRPr lang="en-US" altLang="ja-JP" b="1" dirty="0"/>
+          </a:p>
+          <a:p>
+            <a:r>
+              <a:rPr lang="ja-JP" altLang="en-US" b="1" dirty="0"/>
+              <a:t>必要なことって</a:t>
+            </a:r>
+            <a:endParaRPr lang="en-US" altLang="ja-JP" b="1" dirty="0"/>
+          </a:p>
+          <a:p>
+            <a:r>
+              <a:rPr lang="ja-JP" altLang="en-US" b="1" dirty="0"/>
+              <a:t>なんですか？</a:t>
+            </a:r>
+            <a:endParaRPr lang="en-US" altLang="ja-JP" b="1" dirty="0"/>
+          </a:p>
+        </p:txBody>
+      </p:sp>
+      <p:pic>
+        <p:nvPicPr>
+          <p:cNvPr id="8" name="Picture 7">
+            <a:extLst>
+              <a:ext uri="{FF2B5EF4-FFF2-40B4-BE49-F238E27FC236}">
+                <a16:creationId xmlns:a16="http://schemas.microsoft.com/office/drawing/2014/main" id="{2C1A3891-913D-0691-F419-4EE96815CDC9}"/>
+              </a:ext>
+            </a:extLst>
+          </p:cNvPr>
+          <p:cNvPicPr>
+            <a:picLocks noChangeAspect="1"/>
+          </p:cNvPicPr>
+          <p:nvPr/>
+        </p:nvPicPr>
+        <p:blipFill>
+          <a:blip r:embed="rId4"/>
+          <a:srcRect l="4979" r="7727"/>
+          <a:stretch/>
+        </p:blipFill>
+        <p:spPr>
+          <a:xfrm>
+            <a:off x="1778745" y="2503417"/>
+            <a:ext cx="1660431" cy="1322947"/>
+          </a:xfrm>
+          <a:prstGeom prst="rect">
+            <a:avLst/>
+          </a:prstGeom>
+        </p:spPr>
+      </p:pic>
+      <p:sp>
+        <p:nvSpPr>
+          <p:cNvPr id="9" name="TextBox 8">
+            <a:extLst>
+              <a:ext uri="{FF2B5EF4-FFF2-40B4-BE49-F238E27FC236}">
+                <a16:creationId xmlns:a16="http://schemas.microsoft.com/office/drawing/2014/main" id="{938D2646-74CF-4C0C-1DAA-8645AF5CEA8D}"/>
+              </a:ext>
+            </a:extLst>
+          </p:cNvPr>
+          <p:cNvSpPr txBox="1"/>
+          <p:nvPr/>
+        </p:nvSpPr>
+        <p:spPr>
+          <a:xfrm>
+            <a:off x="3570452" y="3438691"/>
+            <a:ext cx="2374336" cy="646331"/>
+          </a:xfrm>
+          <a:prstGeom prst="rect">
+            <a:avLst/>
+          </a:prstGeom>
+          <a:noFill/>
+        </p:spPr>
+        <p:txBody>
+          <a:bodyPr wrap="square" rtlCol="0">
+            <a:spAutoFit/>
+          </a:bodyPr>
+          <a:lstStyle/>
+          <a:p>
+            <a:r>
+              <a:rPr lang="ja-JP" altLang="en-US" b="1" dirty="0"/>
+              <a:t>失って初めて、</a:t>
+            </a:r>
+            <a:endParaRPr lang="en-US" altLang="ja-JP" b="1" dirty="0"/>
+          </a:p>
+          <a:p>
+            <a:r>
+              <a:rPr lang="ja-JP" altLang="en-US" b="1" dirty="0"/>
+              <a:t>幸せを思い出すの？</a:t>
+            </a:r>
+            <a:endParaRPr lang="en-US" altLang="ja-JP" b="1" dirty="0"/>
+          </a:p>
+        </p:txBody>
+      </p:sp>
+      <p:sp>
+        <p:nvSpPr>
+          <p:cNvPr id="13" name="Rectangle 12">
+            <a:extLst>
+              <a:ext uri="{FF2B5EF4-FFF2-40B4-BE49-F238E27FC236}">
+                <a16:creationId xmlns:a16="http://schemas.microsoft.com/office/drawing/2014/main" id="{A83C4D1E-48DE-F1F0-5949-5444634CBD90}"/>
+              </a:ext>
+            </a:extLst>
+          </p:cNvPr>
+          <p:cNvSpPr/>
+          <p:nvPr/>
+        </p:nvSpPr>
+        <p:spPr>
+          <a:xfrm>
+            <a:off x="866140" y="828200"/>
+            <a:ext cx="1623060" cy="1249680"/>
+          </a:xfrm>
+          <a:prstGeom prst="rect">
+            <a:avLst/>
+          </a:prstGeom>
+          <a:solidFill>
+            <a:srgbClr val="B0A859"/>
+          </a:solidFill>
+          <a:ln>
+            <a:noFill/>
+          </a:ln>
+        </p:spPr>
+        <p:style>
+          <a:lnRef idx="2">
+            <a:schemeClr val="accent1">
+              <a:shade val="15000"/>
+            </a:schemeClr>
+          </a:lnRef>
+          <a:fillRef idx="1">
+            <a:schemeClr val="accent1"/>
+          </a:fillRef>
+          <a:effectRef idx="0">
+            <a:schemeClr val="accent1"/>
+          </a:effectRef>
+          <a:fontRef idx="minor">
+            <a:schemeClr val="lt1"/>
+          </a:fontRef>
+        </p:style>
+        <p:txBody>
+          <a:bodyPr rtlCol="0" anchor="ctr"/>
+          <a:lstStyle/>
+          <a:p>
+            <a:pPr algn="ctr"/>
+            <a:endParaRPr kumimoji="1" lang="ja-JP" altLang="en-US"/>
+          </a:p>
+        </p:txBody>
+      </p:sp>
+      <p:sp>
+        <p:nvSpPr>
+          <p:cNvPr id="14" name="Rectangle 13">
+            <a:extLst>
+              <a:ext uri="{FF2B5EF4-FFF2-40B4-BE49-F238E27FC236}">
+                <a16:creationId xmlns:a16="http://schemas.microsoft.com/office/drawing/2014/main" id="{CDDDFCDB-F108-5305-053E-14255B521951}"/>
+              </a:ext>
+            </a:extLst>
+          </p:cNvPr>
+          <p:cNvSpPr/>
+          <p:nvPr/>
+        </p:nvSpPr>
+        <p:spPr>
+          <a:xfrm>
+            <a:off x="2087880" y="3753098"/>
+            <a:ext cx="487680" cy="198884"/>
+          </a:xfrm>
+          <a:prstGeom prst="rect">
+            <a:avLst/>
+          </a:prstGeom>
+          <a:solidFill>
+            <a:srgbClr val="B0A859"/>
+          </a:solidFill>
+          <a:ln>
+            <a:noFill/>
+          </a:ln>
+        </p:spPr>
+        <p:style>
+          <a:lnRef idx="2">
+            <a:schemeClr val="accent1">
+              <a:shade val="15000"/>
+            </a:schemeClr>
+          </a:lnRef>
+          <a:fillRef idx="1">
+            <a:schemeClr val="accent1"/>
+          </a:fillRef>
+          <a:effectRef idx="0">
+            <a:schemeClr val="accent1"/>
+          </a:effectRef>
+          <a:fontRef idx="minor">
+            <a:schemeClr val="lt1"/>
+          </a:fontRef>
+        </p:style>
+        <p:txBody>
+          <a:bodyPr rtlCol="0" anchor="ctr"/>
+          <a:lstStyle/>
+          <a:p>
+            <a:pPr algn="ctr"/>
+            <a:endParaRPr kumimoji="1" lang="ja-JP" altLang="en-US" dirty="0"/>
+          </a:p>
+        </p:txBody>
+      </p:sp>
+      <p:pic>
+        <p:nvPicPr>
+          <p:cNvPr id="11" name="Picture 10">
+            <a:extLst>
+              <a:ext uri="{FF2B5EF4-FFF2-40B4-BE49-F238E27FC236}">
+                <a16:creationId xmlns:a16="http://schemas.microsoft.com/office/drawing/2014/main" id="{6F41F93D-2621-CBE8-5AB6-7674FA2AE684}"/>
+              </a:ext>
+            </a:extLst>
+          </p:cNvPr>
+          <p:cNvPicPr>
+            <a:picLocks noChangeAspect="1"/>
+          </p:cNvPicPr>
+          <p:nvPr/>
+        </p:nvPicPr>
+        <p:blipFill>
+          <a:blip r:embed="rId5"/>
+          <a:stretch>
+            <a:fillRect/>
+          </a:stretch>
+        </p:blipFill>
+        <p:spPr>
+          <a:xfrm flipV="1">
+            <a:off x="2053728" y="3761857"/>
+            <a:ext cx="555984" cy="172687"/>
+          </a:xfrm>
+          <a:prstGeom prst="rect">
+            <a:avLst/>
+          </a:prstGeom>
+        </p:spPr>
+      </p:pic>
+      <p:sp>
+        <p:nvSpPr>
+          <p:cNvPr id="15" name="Rectangle 14">
+            <a:extLst>
+              <a:ext uri="{FF2B5EF4-FFF2-40B4-BE49-F238E27FC236}">
+                <a16:creationId xmlns:a16="http://schemas.microsoft.com/office/drawing/2014/main" id="{891096D8-9981-A4BC-1990-A6F36D5DD94E}"/>
+              </a:ext>
+            </a:extLst>
+          </p:cNvPr>
+          <p:cNvSpPr/>
+          <p:nvPr/>
+        </p:nvSpPr>
+        <p:spPr>
+          <a:xfrm>
+            <a:off x="2724322" y="3755001"/>
+            <a:ext cx="555984" cy="198884"/>
+          </a:xfrm>
+          <a:prstGeom prst="rect">
+            <a:avLst/>
+          </a:prstGeom>
+          <a:solidFill>
+            <a:srgbClr val="B0A859"/>
+          </a:solidFill>
+          <a:ln>
+            <a:noFill/>
+          </a:ln>
+        </p:spPr>
+        <p:style>
+          <a:lnRef idx="2">
+            <a:schemeClr val="accent1">
+              <a:shade val="15000"/>
+            </a:schemeClr>
+          </a:lnRef>
+          <a:fillRef idx="1">
+            <a:schemeClr val="accent1"/>
+          </a:fillRef>
+          <a:effectRef idx="0">
+            <a:schemeClr val="accent1"/>
+          </a:effectRef>
+          <a:fontRef idx="minor">
+            <a:schemeClr val="lt1"/>
+          </a:fontRef>
+        </p:style>
+        <p:txBody>
+          <a:bodyPr rtlCol="0" anchor="ctr"/>
+          <a:lstStyle/>
+          <a:p>
+            <a:pPr algn="ctr"/>
+            <a:endParaRPr kumimoji="1" lang="ja-JP" altLang="en-US" dirty="0"/>
+          </a:p>
+        </p:txBody>
+      </p:sp>
+      <p:sp>
+        <p:nvSpPr>
+          <p:cNvPr id="16" name="TextBox 15">
+            <a:extLst>
+              <a:ext uri="{FF2B5EF4-FFF2-40B4-BE49-F238E27FC236}">
+                <a16:creationId xmlns:a16="http://schemas.microsoft.com/office/drawing/2014/main" id="{B6C4E370-7780-EB62-C62D-296BFE614EDD}"/>
+              </a:ext>
+            </a:extLst>
+          </p:cNvPr>
+          <p:cNvSpPr txBox="1"/>
+          <p:nvPr/>
+        </p:nvSpPr>
+        <p:spPr>
+          <a:xfrm>
+            <a:off x="3652412" y="4038409"/>
+            <a:ext cx="2946508" cy="646331"/>
+          </a:xfrm>
+          <a:prstGeom prst="rect">
+            <a:avLst/>
+          </a:prstGeom>
+          <a:noFill/>
+        </p:spPr>
+        <p:txBody>
+          <a:bodyPr wrap="square" rtlCol="0">
+            <a:spAutoFit/>
+          </a:bodyPr>
+          <a:lstStyle/>
+          <a:p>
+            <a:r>
+              <a:rPr lang="en-US" altLang="ja-JP" b="1" dirty="0"/>
+              <a:t>Human being : This is a journey to find your love.</a:t>
+            </a:r>
+          </a:p>
+        </p:txBody>
+      </p:sp>
+      <p:pic>
+        <p:nvPicPr>
+          <p:cNvPr id="18" name="Picture 17">
+            <a:extLst>
+              <a:ext uri="{FF2B5EF4-FFF2-40B4-BE49-F238E27FC236}">
+                <a16:creationId xmlns:a16="http://schemas.microsoft.com/office/drawing/2014/main" id="{974CBF69-877F-1361-3045-EB770E043D7C}"/>
+              </a:ext>
+            </a:extLst>
+          </p:cNvPr>
+          <p:cNvPicPr>
+            <a:picLocks noChangeAspect="1"/>
+          </p:cNvPicPr>
+          <p:nvPr/>
+        </p:nvPicPr>
+        <p:blipFill>
+          <a:blip r:embed="rId6"/>
+          <a:stretch>
+            <a:fillRect/>
+          </a:stretch>
+        </p:blipFill>
+        <p:spPr>
+          <a:xfrm>
+            <a:off x="2707715" y="3774148"/>
+            <a:ext cx="705685" cy="177833"/>
+          </a:xfrm>
+          <a:prstGeom prst="rect">
+            <a:avLst/>
+          </a:prstGeom>
+        </p:spPr>
+      </p:pic>
+      <p:sp>
+        <p:nvSpPr>
+          <p:cNvPr id="19" name="Rectangle 18">
+            <a:extLst>
+              <a:ext uri="{FF2B5EF4-FFF2-40B4-BE49-F238E27FC236}">
+                <a16:creationId xmlns:a16="http://schemas.microsoft.com/office/drawing/2014/main" id="{602D4349-26E7-323F-4572-2C0DF8FE939D}"/>
+              </a:ext>
+            </a:extLst>
+          </p:cNvPr>
+          <p:cNvSpPr/>
+          <p:nvPr/>
+        </p:nvSpPr>
+        <p:spPr>
+          <a:xfrm>
+            <a:off x="1778745" y="4422200"/>
+            <a:ext cx="1660431" cy="291810"/>
+          </a:xfrm>
+          <a:prstGeom prst="rect">
+            <a:avLst/>
+          </a:prstGeom>
+          <a:solidFill>
+            <a:srgbClr val="B1B1B1"/>
+          </a:solidFill>
+          <a:ln>
+            <a:noFill/>
+          </a:ln>
+        </p:spPr>
+        <p:style>
+          <a:lnRef idx="2">
+            <a:schemeClr val="accent1">
+              <a:shade val="15000"/>
+            </a:schemeClr>
+          </a:lnRef>
+          <a:fillRef idx="1">
+            <a:schemeClr val="accent1"/>
+          </a:fillRef>
+          <a:effectRef idx="0">
+            <a:schemeClr val="accent1"/>
+          </a:effectRef>
+          <a:fontRef idx="minor">
+            <a:schemeClr val="lt1"/>
+          </a:fontRef>
+        </p:style>
+        <p:txBody>
+          <a:bodyPr rtlCol="0" anchor="ctr"/>
+          <a:lstStyle/>
+          <a:p>
+            <a:pPr algn="ctr"/>
+            <a:endParaRPr kumimoji="1" lang="ja-JP" altLang="en-US"/>
+          </a:p>
+        </p:txBody>
+      </p:sp>
+      <p:sp>
+        <p:nvSpPr>
+          <p:cNvPr id="20" name="TextBox 19">
+            <a:extLst>
+              <a:ext uri="{FF2B5EF4-FFF2-40B4-BE49-F238E27FC236}">
+                <a16:creationId xmlns:a16="http://schemas.microsoft.com/office/drawing/2014/main" id="{8CCD03EA-504D-E81C-23B7-432B5893EA4A}"/>
+              </a:ext>
+            </a:extLst>
+          </p:cNvPr>
+          <p:cNvSpPr txBox="1"/>
+          <p:nvPr/>
+        </p:nvSpPr>
+        <p:spPr>
+          <a:xfrm>
+            <a:off x="3635301" y="1186422"/>
+            <a:ext cx="6520378" cy="923330"/>
+          </a:xfrm>
+          <a:prstGeom prst="rect">
+            <a:avLst/>
+          </a:prstGeom>
+          <a:noFill/>
+        </p:spPr>
+        <p:txBody>
+          <a:bodyPr wrap="square" rtlCol="0">
+            <a:spAutoFit/>
+          </a:bodyPr>
+          <a:lstStyle/>
+          <a:p>
+            <a:pPr algn="ctr"/>
+            <a:r>
+              <a:rPr lang="en-US" altLang="ja-JP" b="1" dirty="0"/>
+              <a:t>Flashback to 2019–2020, when life was full of happiness.</a:t>
+            </a:r>
+            <a:br>
+              <a:rPr lang="en-US" altLang="ja-JP" b="1" dirty="0"/>
+            </a:br>
+            <a:r>
+              <a:rPr lang="en-US" altLang="ja-JP" b="1" dirty="0"/>
+              <a:t>It wasn’t so long ago, yet I’ve come so far.</a:t>
+            </a:r>
+            <a:br>
+              <a:rPr lang="en-US" altLang="ja-JP" b="1" dirty="0"/>
+            </a:br>
+            <a:r>
+              <a:rPr lang="en-US" altLang="ja-JP" b="1" dirty="0"/>
+              <a:t>That’s why this is the final travel to Return.</a:t>
+            </a:r>
+          </a:p>
+        </p:txBody>
+      </p:sp>
+      <p:pic>
+        <p:nvPicPr>
+          <p:cNvPr id="28" name="Picture 27">
+            <a:extLst>
+              <a:ext uri="{FF2B5EF4-FFF2-40B4-BE49-F238E27FC236}">
+                <a16:creationId xmlns:a16="http://schemas.microsoft.com/office/drawing/2014/main" id="{446C060C-0607-A864-B8EA-82EA5863DA7D}"/>
+              </a:ext>
+            </a:extLst>
+          </p:cNvPr>
+          <p:cNvPicPr>
+            <a:picLocks noChangeAspect="1"/>
+          </p:cNvPicPr>
+          <p:nvPr/>
+        </p:nvPicPr>
+        <p:blipFill>
+          <a:blip r:embed="rId7"/>
+          <a:stretch>
+            <a:fillRect/>
+          </a:stretch>
+        </p:blipFill>
+        <p:spPr>
+          <a:xfrm>
+            <a:off x="1785451" y="4416131"/>
+            <a:ext cx="1653725" cy="263371"/>
+          </a:xfrm>
+          <a:prstGeom prst="rect">
+            <a:avLst/>
+          </a:prstGeom>
+        </p:spPr>
+      </p:pic>
     </p:spTree>
     <p:extLst>
       <p:ext uri="{BB962C8B-B14F-4D97-AF65-F5344CB8AC3E}">
         <p14:creationId xmlns:p14="http://schemas.microsoft.com/office/powerpoint/2010/main" val="3021995907"/>
+      </p:ext>
+    </p:extLst>
+  </p:cSld>
+  <p:clrMapOvr>
+    <a:masterClrMapping/>
+  </p:clrMapOvr>
+</p:sld>
+</file>
+
+<file path=ppt/slides/slide3.xml><?xml version="1.0" encoding="utf-8"?>
+<p:sld xmlns:a="http://schemas.openxmlformats.org/drawingml/2006/main" xmlns:r="http://schemas.openxmlformats.org/officeDocument/2006/relationships" xmlns:p="http://schemas.openxmlformats.org/presentationml/2006/main">
+  <p:cSld>
+    <p:spTree>
+      <p:nvGrpSpPr>
+        <p:cNvPr id="1" name=""/>
+        <p:cNvGrpSpPr/>
+        <p:nvPr/>
+      </p:nvGrpSpPr>
+      <p:grpSpPr>
+        <a:xfrm>
+          <a:off x="0" y="0"/>
+          <a:ext cx="0" cy="0"/>
+          <a:chOff x="0" y="0"/>
+          <a:chExt cx="0" cy="0"/>
+        </a:xfrm>
+      </p:grpSpPr>
+      <p:pic>
+        <p:nvPicPr>
+          <p:cNvPr id="2050" name="Picture 2" descr="六本木駅の発車標 | 鉄道好きの旅日記＆写真館">
+            <a:extLst>
+              <a:ext uri="{FF2B5EF4-FFF2-40B4-BE49-F238E27FC236}">
+                <a16:creationId xmlns:a16="http://schemas.microsoft.com/office/drawing/2014/main" id="{85B66BE7-EE58-2E35-4F7E-507098B99FB3}"/>
+              </a:ext>
+            </a:extLst>
+          </p:cNvPr>
+          <p:cNvPicPr>
+            <a:picLocks noChangeAspect="1" noChangeArrowheads="1"/>
+          </p:cNvPicPr>
+          <p:nvPr/>
+        </p:nvPicPr>
+        <p:blipFill rotWithShape="1">
+          <a:blip r:embed="rId2">
+            <a:extLst>
+              <a:ext uri="{28A0092B-C50C-407E-A947-70E740481C1C}">
+                <a14:useLocalDpi xmlns:a14="http://schemas.microsoft.com/office/drawing/2010/main" val="0"/>
+              </a:ext>
+            </a:extLst>
+          </a:blip>
+          <a:srcRect l="4950" t="35800" r="919" b="24200"/>
+          <a:stretch/>
+        </p:blipFill>
+        <p:spPr bwMode="auto">
+          <a:xfrm>
+            <a:off x="5179059" y="528320"/>
+            <a:ext cx="5397501" cy="1524000"/>
+          </a:xfrm>
+          <a:prstGeom prst="rect">
+            <a:avLst/>
+          </a:prstGeom>
+          <a:noFill/>
+          <a:extLst>
+            <a:ext uri="{909E8E84-426E-40DD-AFC4-6F175D3DCCD1}">
+              <a14:hiddenFill xmlns:a14="http://schemas.microsoft.com/office/drawing/2010/main">
+                <a:solidFill>
+                  <a:srgbClr val="FFFFFF"/>
+                </a:solidFill>
+              </a14:hiddenFill>
+            </a:ext>
+          </a:extLst>
+        </p:spPr>
+      </p:pic>
+      <p:sp>
+        <p:nvSpPr>
+          <p:cNvPr id="4" name="Rectangle 3">
+            <a:extLst>
+              <a:ext uri="{FF2B5EF4-FFF2-40B4-BE49-F238E27FC236}">
+                <a16:creationId xmlns:a16="http://schemas.microsoft.com/office/drawing/2014/main" id="{FE245C61-BCBE-37FC-7AE6-A25A502329D3}"/>
+              </a:ext>
+            </a:extLst>
+          </p:cNvPr>
+          <p:cNvSpPr/>
+          <p:nvPr/>
+        </p:nvSpPr>
+        <p:spPr>
+          <a:xfrm>
+            <a:off x="820420" y="2252980"/>
+            <a:ext cx="8704580" cy="2125980"/>
+          </a:xfrm>
+          <a:prstGeom prst="rect">
+            <a:avLst/>
+          </a:prstGeom>
+          <a:gradFill>
+            <a:gsLst>
+              <a:gs pos="0">
+                <a:srgbClr val="181B22"/>
+              </a:gs>
+              <a:gs pos="11000">
+                <a:srgbClr val="192334"/>
+              </a:gs>
+              <a:gs pos="42000">
+                <a:srgbClr val="1B2B48"/>
+              </a:gs>
+              <a:gs pos="100000">
+                <a:srgbClr val="192539"/>
+              </a:gs>
+            </a:gsLst>
+            <a:lin ang="1800000" scaled="0"/>
+          </a:gradFill>
+          <a:ln>
+            <a:noFill/>
+          </a:ln>
+        </p:spPr>
+        <p:style>
+          <a:lnRef idx="2">
+            <a:schemeClr val="accent1">
+              <a:shade val="15000"/>
+            </a:schemeClr>
+          </a:lnRef>
+          <a:fillRef idx="1">
+            <a:schemeClr val="accent1"/>
+          </a:fillRef>
+          <a:effectRef idx="0">
+            <a:schemeClr val="accent1"/>
+          </a:effectRef>
+          <a:fontRef idx="minor">
+            <a:schemeClr val="lt1"/>
+          </a:fontRef>
+        </p:style>
+        <p:txBody>
+          <a:bodyPr rtlCol="0" anchor="ctr"/>
+          <a:lstStyle/>
+          <a:p>
+            <a:pPr algn="ctr"/>
+            <a:endParaRPr kumimoji="1" lang="ja-JP" altLang="en-US"/>
+          </a:p>
+        </p:txBody>
+      </p:sp>
+      <p:sp>
+        <p:nvSpPr>
+          <p:cNvPr id="5" name="TextBox 4">
+            <a:extLst>
+              <a:ext uri="{FF2B5EF4-FFF2-40B4-BE49-F238E27FC236}">
+                <a16:creationId xmlns:a16="http://schemas.microsoft.com/office/drawing/2014/main" id="{FF320540-CC28-F9E6-36DE-CB51D53EB696}"/>
+              </a:ext>
+            </a:extLst>
+          </p:cNvPr>
+          <p:cNvSpPr txBox="1"/>
+          <p:nvPr/>
+        </p:nvSpPr>
+        <p:spPr>
+          <a:xfrm>
+            <a:off x="1856739" y="528320"/>
+            <a:ext cx="2611318" cy="630942"/>
+          </a:xfrm>
+          <a:prstGeom prst="rect">
+            <a:avLst/>
+          </a:prstGeom>
+          <a:noFill/>
+        </p:spPr>
+        <p:txBody>
+          <a:bodyPr wrap="square" rtlCol="0">
+            <a:spAutoFit/>
+          </a:bodyPr>
+          <a:lstStyle/>
+          <a:p>
+            <a:r>
+              <a:rPr lang="ja-JP" altLang="en-US" sz="3500" dirty="0">
+                <a:ln>
+                  <a:solidFill>
+                    <a:srgbClr val="CACDC5"/>
+                  </a:solidFill>
+                </a:ln>
+                <a:solidFill>
+                  <a:srgbClr val="CACDC5"/>
+                </a:solidFill>
+                <a:effectLst>
+                  <a:glow>
+                    <a:srgbClr val="CACDC5"/>
+                  </a:glow>
+                </a:effectLst>
+              </a:rPr>
+              <a:t>中目黒方面</a:t>
+            </a:r>
+            <a:endParaRPr lang="en-US" altLang="ja-JP" sz="3500" dirty="0">
+              <a:ln>
+                <a:solidFill>
+                  <a:srgbClr val="CACDC5"/>
+                </a:solidFill>
+              </a:ln>
+              <a:solidFill>
+                <a:srgbClr val="CACDC5"/>
+              </a:solidFill>
+              <a:effectLst>
+                <a:glow>
+                  <a:srgbClr val="CACDC5"/>
+                </a:glow>
+              </a:effectLst>
+            </a:endParaRPr>
+          </a:p>
+        </p:txBody>
+      </p:sp>
+      <p:sp>
+        <p:nvSpPr>
+          <p:cNvPr id="8" name="TextBox 7">
+            <a:extLst>
+              <a:ext uri="{FF2B5EF4-FFF2-40B4-BE49-F238E27FC236}">
+                <a16:creationId xmlns:a16="http://schemas.microsoft.com/office/drawing/2014/main" id="{3871A2A8-528E-3975-D970-0A3E2410287B}"/>
+              </a:ext>
+            </a:extLst>
+          </p:cNvPr>
+          <p:cNvSpPr txBox="1"/>
+          <p:nvPr/>
+        </p:nvSpPr>
+        <p:spPr>
+          <a:xfrm>
+            <a:off x="3964698" y="398324"/>
+            <a:ext cx="977901" cy="1169551"/>
+          </a:xfrm>
+          <a:prstGeom prst="rect">
+            <a:avLst/>
+          </a:prstGeom>
+          <a:noFill/>
+        </p:spPr>
+        <p:txBody>
+          <a:bodyPr wrap="square" rtlCol="0">
+            <a:spAutoFit/>
+          </a:bodyPr>
+          <a:lstStyle/>
+          <a:p>
+            <a:r>
+              <a:rPr lang="ja-JP" altLang="en-US" sz="7000" b="1" dirty="0">
+                <a:ln>
+                  <a:solidFill>
+                    <a:srgbClr val="CACDC5"/>
+                  </a:solidFill>
+                </a:ln>
+                <a:solidFill>
+                  <a:srgbClr val="CACDC5"/>
+                </a:solidFill>
+                <a:effectLst>
+                  <a:glow>
+                    <a:srgbClr val="CACDC5"/>
+                  </a:glow>
+                </a:effectLst>
+              </a:rPr>
+              <a:t>１</a:t>
+            </a:r>
+            <a:endParaRPr lang="en-US" altLang="ja-JP" sz="7000" b="1" dirty="0">
+              <a:ln>
+                <a:solidFill>
+                  <a:srgbClr val="CACDC5"/>
+                </a:solidFill>
+              </a:ln>
+              <a:solidFill>
+                <a:srgbClr val="CACDC5"/>
+              </a:solidFill>
+              <a:effectLst>
+                <a:glow>
+                  <a:srgbClr val="CACDC5"/>
+                </a:glow>
+              </a:effectLst>
+            </a:endParaRPr>
+          </a:p>
+        </p:txBody>
+      </p:sp>
+      <p:pic>
+        <p:nvPicPr>
+          <p:cNvPr id="10" name="Picture 9">
+            <a:extLst>
+              <a:ext uri="{FF2B5EF4-FFF2-40B4-BE49-F238E27FC236}">
+                <a16:creationId xmlns:a16="http://schemas.microsoft.com/office/drawing/2014/main" id="{3EA1445D-50B7-5F7C-E832-6E9F117C4F3B}"/>
+              </a:ext>
+            </a:extLst>
+          </p:cNvPr>
+          <p:cNvPicPr>
+            <a:picLocks noChangeAspect="1"/>
+          </p:cNvPicPr>
+          <p:nvPr/>
+        </p:nvPicPr>
+        <p:blipFill>
+          <a:blip r:embed="rId3"/>
+          <a:stretch>
+            <a:fillRect/>
+          </a:stretch>
+        </p:blipFill>
+        <p:spPr>
+          <a:xfrm>
+            <a:off x="9608820" y="1982718"/>
+            <a:ext cx="2672080" cy="1189742"/>
+          </a:xfrm>
+          <a:prstGeom prst="rect">
+            <a:avLst/>
+          </a:prstGeom>
+        </p:spPr>
+      </p:pic>
+      <p:pic>
+        <p:nvPicPr>
+          <p:cNvPr id="12" name="Picture 11">
+            <a:extLst>
+              <a:ext uri="{FF2B5EF4-FFF2-40B4-BE49-F238E27FC236}">
+                <a16:creationId xmlns:a16="http://schemas.microsoft.com/office/drawing/2014/main" id="{3E97FE12-1053-0654-DDA5-43235C6676D8}"/>
+              </a:ext>
+            </a:extLst>
+          </p:cNvPr>
+          <p:cNvPicPr>
+            <a:picLocks noChangeAspect="1"/>
+          </p:cNvPicPr>
+          <p:nvPr/>
+        </p:nvPicPr>
+        <p:blipFill>
+          <a:blip r:embed="rId4">
+            <a:extLst>
+              <a:ext uri="{BEBA8EAE-BF5A-486C-A8C5-ECC9F3942E4B}">
+                <a14:imgProps xmlns:a14="http://schemas.microsoft.com/office/drawing/2010/main">
+                  <a14:imgLayer r:embed="rId5">
+                    <a14:imgEffect>
+                      <a14:saturation sat="0"/>
+                    </a14:imgEffect>
+                    <a14:imgEffect>
+                      <a14:brightnessContrast bright="26000"/>
+                    </a14:imgEffect>
+                  </a14:imgLayer>
+                </a14:imgProps>
+              </a:ext>
+            </a:extLst>
+          </a:blip>
+          <a:stretch>
+            <a:fillRect/>
+          </a:stretch>
+        </p:blipFill>
+        <p:spPr>
+          <a:xfrm>
+            <a:off x="6621144" y="2423847"/>
+            <a:ext cx="2513330" cy="1125731"/>
+          </a:xfrm>
+          <a:prstGeom prst="rect">
+            <a:avLst/>
+          </a:prstGeom>
+        </p:spPr>
+      </p:pic>
+      <p:pic>
+        <p:nvPicPr>
+          <p:cNvPr id="14" name="Picture 13">
+            <a:extLst>
+              <a:ext uri="{FF2B5EF4-FFF2-40B4-BE49-F238E27FC236}">
+                <a16:creationId xmlns:a16="http://schemas.microsoft.com/office/drawing/2014/main" id="{C03F41CB-BB0E-0AF5-1DBD-F9525F6FF56F}"/>
+              </a:ext>
+            </a:extLst>
+          </p:cNvPr>
+          <p:cNvPicPr>
+            <a:picLocks noChangeAspect="1"/>
+          </p:cNvPicPr>
+          <p:nvPr/>
+        </p:nvPicPr>
+        <p:blipFill>
+          <a:blip r:embed="rId6"/>
+          <a:stretch>
+            <a:fillRect/>
+          </a:stretch>
+        </p:blipFill>
+        <p:spPr>
+          <a:xfrm>
+            <a:off x="1031880" y="156793"/>
+            <a:ext cx="9030960" cy="371527"/>
+          </a:xfrm>
+          <a:prstGeom prst="rect">
+            <a:avLst/>
+          </a:prstGeom>
+        </p:spPr>
+      </p:pic>
+      <p:pic>
+        <p:nvPicPr>
+          <p:cNvPr id="16" name="Picture 15">
+            <a:extLst>
+              <a:ext uri="{FF2B5EF4-FFF2-40B4-BE49-F238E27FC236}">
+                <a16:creationId xmlns:a16="http://schemas.microsoft.com/office/drawing/2014/main" id="{E5C6076E-11DE-F493-70CD-2AE158A18EC5}"/>
+              </a:ext>
+            </a:extLst>
+          </p:cNvPr>
+          <p:cNvPicPr>
+            <a:picLocks noChangeAspect="1"/>
+          </p:cNvPicPr>
+          <p:nvPr/>
+        </p:nvPicPr>
+        <p:blipFill>
+          <a:blip r:embed="rId7">
+            <a:extLst>
+              <a:ext uri="{BEBA8EAE-BF5A-486C-A8C5-ECC9F3942E4B}">
+                <a14:imgProps xmlns:a14="http://schemas.microsoft.com/office/drawing/2010/main">
+                  <a14:imgLayer r:embed="rId8">
+                    <a14:imgEffect>
+                      <a14:sharpenSoften amount="-7000"/>
+                    </a14:imgEffect>
+                    <a14:imgEffect>
+                      <a14:colorTemperature colorTemp="5884"/>
+                    </a14:imgEffect>
+                    <a14:imgEffect>
+                      <a14:saturation sat="149000"/>
+                    </a14:imgEffect>
+                    <a14:imgEffect>
+                      <a14:brightnessContrast bright="-9000" contrast="-25000"/>
+                    </a14:imgEffect>
+                  </a14:imgLayer>
+                </a14:imgProps>
+              </a:ext>
+            </a:extLst>
+          </a:blip>
+          <a:stretch>
+            <a:fillRect/>
+          </a:stretch>
+        </p:blipFill>
+        <p:spPr>
+          <a:xfrm>
+            <a:off x="940343" y="2526789"/>
+            <a:ext cx="5680801" cy="1613161"/>
+          </a:xfrm>
+          <a:prstGeom prst="rect">
+            <a:avLst/>
+          </a:prstGeom>
+        </p:spPr>
+      </p:pic>
+      <p:pic>
+        <p:nvPicPr>
+          <p:cNvPr id="18" name="Picture 17">
+            <a:extLst>
+              <a:ext uri="{FF2B5EF4-FFF2-40B4-BE49-F238E27FC236}">
+                <a16:creationId xmlns:a16="http://schemas.microsoft.com/office/drawing/2014/main" id="{ACAC2375-F8AF-EAA7-3DD3-C353FC370BD6}"/>
+              </a:ext>
+            </a:extLst>
+          </p:cNvPr>
+          <p:cNvPicPr>
+            <a:picLocks noChangeAspect="1"/>
+          </p:cNvPicPr>
+          <p:nvPr/>
+        </p:nvPicPr>
+        <p:blipFill>
+          <a:blip r:embed="rId9">
+            <a:extLst>
+              <a:ext uri="{BEBA8EAE-BF5A-486C-A8C5-ECC9F3942E4B}">
+                <a14:imgProps xmlns:a14="http://schemas.microsoft.com/office/drawing/2010/main">
+                  <a14:imgLayer r:embed="rId10">
+                    <a14:imgEffect>
+                      <a14:brightnessContrast bright="17000" contrast="-54000"/>
+                    </a14:imgEffect>
+                  </a14:imgLayer>
+                </a14:imgProps>
+              </a:ext>
+            </a:extLst>
+          </a:blip>
+          <a:stretch>
+            <a:fillRect/>
+          </a:stretch>
+        </p:blipFill>
+        <p:spPr>
+          <a:xfrm>
+            <a:off x="7170420" y="3648558"/>
+            <a:ext cx="1872614" cy="564607"/>
+          </a:xfrm>
+          <a:prstGeom prst="rect">
+            <a:avLst/>
+          </a:prstGeom>
+        </p:spPr>
+      </p:pic>
+      <p:sp>
+        <p:nvSpPr>
+          <p:cNvPr id="19" name="Rectangle 18">
+            <a:extLst>
+              <a:ext uri="{FF2B5EF4-FFF2-40B4-BE49-F238E27FC236}">
+                <a16:creationId xmlns:a16="http://schemas.microsoft.com/office/drawing/2014/main" id="{1063E537-C6D7-AB14-3DA0-C0D7BAA551D1}"/>
+              </a:ext>
+            </a:extLst>
+          </p:cNvPr>
+          <p:cNvSpPr/>
+          <p:nvPr/>
+        </p:nvSpPr>
+        <p:spPr>
+          <a:xfrm>
+            <a:off x="891540" y="2491740"/>
+            <a:ext cx="5729604" cy="1661160"/>
+          </a:xfrm>
+          <a:prstGeom prst="rect">
+            <a:avLst/>
+          </a:prstGeom>
+          <a:gradFill flip="none" rotWithShape="1">
+            <a:gsLst>
+              <a:gs pos="100000">
+                <a:schemeClr val="tx1">
+                  <a:alpha val="40000"/>
+                </a:schemeClr>
+              </a:gs>
+              <a:gs pos="75000">
+                <a:schemeClr val="tx1">
+                  <a:alpha val="0"/>
+                </a:schemeClr>
+              </a:gs>
+            </a:gsLst>
+            <a:path path="circle">
+              <a:fillToRect l="50000" t="50000" r="50000" b="50000"/>
+            </a:path>
+            <a:tileRect/>
+          </a:gradFill>
+          <a:ln>
+            <a:noFill/>
+          </a:ln>
+        </p:spPr>
+        <p:style>
+          <a:lnRef idx="2">
+            <a:schemeClr val="accent1">
+              <a:shade val="15000"/>
+            </a:schemeClr>
+          </a:lnRef>
+          <a:fillRef idx="1">
+            <a:schemeClr val="accent1"/>
+          </a:fillRef>
+          <a:effectRef idx="0">
+            <a:schemeClr val="accent1"/>
+          </a:effectRef>
+          <a:fontRef idx="minor">
+            <a:schemeClr val="lt1"/>
+          </a:fontRef>
+        </p:style>
+        <p:txBody>
+          <a:bodyPr rtlCol="0" anchor="ctr"/>
+          <a:lstStyle/>
+          <a:p>
+            <a:pPr algn="ctr"/>
+            <a:endParaRPr kumimoji="1" lang="ja-JP" altLang="en-US"/>
+          </a:p>
+        </p:txBody>
+      </p:sp>
+      <p:sp>
+        <p:nvSpPr>
+          <p:cNvPr id="20" name="Rectangle 19">
+            <a:extLst>
+              <a:ext uri="{FF2B5EF4-FFF2-40B4-BE49-F238E27FC236}">
+                <a16:creationId xmlns:a16="http://schemas.microsoft.com/office/drawing/2014/main" id="{25D127DE-CD6E-AFB7-DD25-DCC9E5DB2009}"/>
+              </a:ext>
+            </a:extLst>
+          </p:cNvPr>
+          <p:cNvSpPr/>
+          <p:nvPr/>
+        </p:nvSpPr>
+        <p:spPr>
+          <a:xfrm>
+            <a:off x="820420" y="4445176"/>
+            <a:ext cx="8704580" cy="299720"/>
+          </a:xfrm>
+          <a:prstGeom prst="rect">
+            <a:avLst/>
+          </a:prstGeom>
+          <a:solidFill>
+            <a:srgbClr val="121214"/>
+          </a:solidFill>
+          <a:ln w="38100">
+            <a:solidFill>
+              <a:srgbClr val="373328"/>
+            </a:solidFill>
+          </a:ln>
+        </p:spPr>
+        <p:style>
+          <a:lnRef idx="2">
+            <a:schemeClr val="accent1">
+              <a:shade val="15000"/>
+            </a:schemeClr>
+          </a:lnRef>
+          <a:fillRef idx="1">
+            <a:schemeClr val="accent1"/>
+          </a:fillRef>
+          <a:effectRef idx="0">
+            <a:schemeClr val="accent1"/>
+          </a:effectRef>
+          <a:fontRef idx="minor">
+            <a:schemeClr val="lt1"/>
+          </a:fontRef>
+        </p:style>
+        <p:txBody>
+          <a:bodyPr rtlCol="0" anchor="ctr"/>
+          <a:lstStyle/>
+          <a:p>
+            <a:pPr algn="ctr"/>
+            <a:endParaRPr kumimoji="1" lang="ja-JP" altLang="en-US"/>
+          </a:p>
+        </p:txBody>
+      </p:sp>
+    </p:spTree>
+    <p:extLst>
+      <p:ext uri="{BB962C8B-B14F-4D97-AF65-F5344CB8AC3E}">
+        <p14:creationId xmlns:p14="http://schemas.microsoft.com/office/powerpoint/2010/main" val="862798005"/>
       </p:ext>
     </p:extLst>
   </p:cSld>
@@ -4753,4 +6379,299 @@
     </a:ext>
   </a:extLst>
 </a:theme>
+</file>
+
+<file path=ppt/theme/theme2.xml><?xml version="1.0" encoding="utf-8"?>
+<a:theme xmlns:a="http://schemas.openxmlformats.org/drawingml/2006/main" name="Office Theme">
+  <a:themeElements>
+    <a:clrScheme name="Office">
+      <a:dk1>
+        <a:sysClr val="windowText" lastClr="000000"/>
+      </a:dk1>
+      <a:lt1>
+        <a:sysClr val="window" lastClr="FFFFFF"/>
+      </a:lt1>
+      <a:dk2>
+        <a:srgbClr val="44546A"/>
+      </a:dk2>
+      <a:lt2>
+        <a:srgbClr val="E7E6E6"/>
+      </a:lt2>
+      <a:accent1>
+        <a:srgbClr val="4472C4"/>
+      </a:accent1>
+      <a:accent2>
+        <a:srgbClr val="ED7D31"/>
+      </a:accent2>
+      <a:accent3>
+        <a:srgbClr val="A5A5A5"/>
+      </a:accent3>
+      <a:accent4>
+        <a:srgbClr val="FFC000"/>
+      </a:accent4>
+      <a:accent5>
+        <a:srgbClr val="5B9BD5"/>
+      </a:accent5>
+      <a:accent6>
+        <a:srgbClr val="70AD47"/>
+      </a:accent6>
+      <a:hlink>
+        <a:srgbClr val="0563C1"/>
+      </a:hlink>
+      <a:folHlink>
+        <a:srgbClr val="954F72"/>
+      </a:folHlink>
+    </a:clrScheme>
+    <a:fontScheme name="Office">
+      <a:majorFont>
+        <a:latin typeface="游ゴシック Light" panose="020F0302020204030204"/>
+        <a:ea typeface=""/>
+        <a:cs typeface=""/>
+        <a:font script="Jpan" typeface="游ゴシック Light"/>
+        <a:font script="Hang" typeface="맑은 고딕"/>
+        <a:font script="Hans" typeface="等线 Light"/>
+        <a:font script="Hant" typeface="新細明體"/>
+        <a:font script="Arab" typeface="Times New Roman"/>
+        <a:font script="Hebr" typeface="Times New Roman"/>
+        <a:font script="Thai" typeface="Angsana New"/>
+        <a:font script="Ethi" typeface="Nyala"/>
+        <a:font script="Beng" typeface="Vrinda"/>
+        <a:font script="Gujr" typeface="Shruti"/>
+        <a:font script="Khmr" typeface="MoolBoran"/>
+        <a:font script="Knda" typeface="Tunga"/>
+        <a:font script="Guru" typeface="Raavi"/>
+        <a:font script="Cans" typeface="Euphemia"/>
+        <a:font script="Cher" typeface="Plantagenet Cherokee"/>
+        <a:font script="Yiii" typeface="Microsoft Yi Baiti"/>
+        <a:font script="Tibt" typeface="Microsoft Himalaya"/>
+        <a:font script="Thaa" typeface="MV Boli"/>
+        <a:font script="Deva" typeface="Mangal"/>
+        <a:font script="Telu" typeface="Gautami"/>
+        <a:font script="Taml" typeface="Latha"/>
+        <a:font script="Syrc" typeface="Estrangelo Edessa"/>
+        <a:font script="Orya" typeface="Kalinga"/>
+        <a:font script="Mlym" typeface="Kartika"/>
+        <a:font script="Laoo" typeface="DokChampa"/>
+        <a:font script="Sinh" typeface="Iskoola Pota"/>
+        <a:font script="Mong" typeface="Mongolian Baiti"/>
+        <a:font script="Viet" typeface="Times New Roman"/>
+        <a:font script="Uigh" typeface="Microsoft Uighur"/>
+        <a:font script="Geor" typeface="Sylfaen"/>
+        <a:font script="Armn" typeface="Arial"/>
+        <a:font script="Bugi" typeface="Leelawadee UI"/>
+        <a:font script="Bopo" typeface="Microsoft JhengHei"/>
+        <a:font script="Java" typeface="Javanese Text"/>
+        <a:font script="Lisu" typeface="Segoe UI"/>
+        <a:font script="Mymr" typeface="Myanmar Text"/>
+        <a:font script="Nkoo" typeface="Ebrima"/>
+        <a:font script="Olck" typeface="Nirmala UI"/>
+        <a:font script="Osma" typeface="Ebrima"/>
+        <a:font script="Phag" typeface="Phagspa"/>
+        <a:font script="Syrn" typeface="Estrangelo Edessa"/>
+        <a:font script="Syrj" typeface="Estrangelo Edessa"/>
+        <a:font script="Syre" typeface="Estrangelo Edessa"/>
+        <a:font script="Sora" typeface="Nirmala UI"/>
+        <a:font script="Tale" typeface="Microsoft Tai Le"/>
+        <a:font script="Talu" typeface="Microsoft New Tai Lue"/>
+        <a:font script="Tfng" typeface="Ebrima"/>
+      </a:majorFont>
+      <a:minorFont>
+        <a:latin typeface="游ゴシック" panose="020F0502020204030204"/>
+        <a:ea typeface=""/>
+        <a:cs typeface=""/>
+        <a:font script="Jpan" typeface="游ゴシック"/>
+        <a:font script="Hang" typeface="맑은 고딕"/>
+        <a:font script="Hans" typeface="等线"/>
+        <a:font script="Hant" typeface="新細明體"/>
+        <a:font script="Arab" typeface="Arial"/>
+        <a:font script="Hebr" typeface="Arial"/>
+        <a:font script="Thai" typeface="Cordia New"/>
+        <a:font script="Ethi" typeface="Nyala"/>
+        <a:font script="Beng" typeface="Vrinda"/>
+        <a:font script="Gujr" typeface="Shruti"/>
+        <a:font script="Khmr" typeface="DaunPenh"/>
+        <a:font script="Knda" typeface="Tunga"/>
+        <a:font script="Guru" typeface="Raavi"/>
+        <a:font script="Cans" typeface="Euphemia"/>
+        <a:font script="Cher" typeface="Plantagenet Cherokee"/>
+        <a:font script="Yiii" typeface="Microsoft Yi Baiti"/>
+        <a:font script="Tibt" typeface="Microsoft Himalaya"/>
+        <a:font script="Thaa" typeface="MV Boli"/>
+        <a:font script="Deva" typeface="Mangal"/>
+        <a:font script="Telu" typeface="Gautami"/>
+        <a:font script="Taml" typeface="Latha"/>
+        <a:font script="Syrc" typeface="Estrangelo Edessa"/>
+        <a:font script="Orya" typeface="Kalinga"/>
+        <a:font script="Mlym" typeface="Kartika"/>
+        <a:font script="Laoo" typeface="DokChampa"/>
+        <a:font script="Sinh" typeface="Iskoola Pota"/>
+        <a:font script="Mong" typeface="Mongolian Baiti"/>
+        <a:font script="Viet" typeface="Arial"/>
+        <a:font script="Uigh" typeface="Microsoft Uighur"/>
+        <a:font script="Geor" typeface="Sylfaen"/>
+        <a:font script="Armn" typeface="Arial"/>
+        <a:font script="Bugi" typeface="Leelawadee UI"/>
+        <a:font script="Bopo" typeface="Microsoft JhengHei"/>
+        <a:font script="Java" typeface="Javanese Text"/>
+        <a:font script="Lisu" typeface="Segoe UI"/>
+        <a:font script="Mymr" typeface="Myanmar Text"/>
+        <a:font script="Nkoo" typeface="Ebrima"/>
+        <a:font script="Olck" typeface="Nirmala UI"/>
+        <a:font script="Osma" typeface="Ebrima"/>
+        <a:font script="Phag" typeface="Phagspa"/>
+        <a:font script="Syrn" typeface="Estrangelo Edessa"/>
+        <a:font script="Syrj" typeface="Estrangelo Edessa"/>
+        <a:font script="Syre" typeface="Estrangelo Edessa"/>
+        <a:font script="Sora" typeface="Nirmala UI"/>
+        <a:font script="Tale" typeface="Microsoft Tai Le"/>
+        <a:font script="Talu" typeface="Microsoft New Tai Lue"/>
+        <a:font script="Tfng" typeface="Ebrima"/>
+      </a:minorFont>
+    </a:fontScheme>
+    <a:fmtScheme name="Office">
+      <a:fillStyleLst>
+        <a:solidFill>
+          <a:schemeClr val="phClr"/>
+        </a:solidFill>
+        <a:gradFill rotWithShape="1">
+          <a:gsLst>
+            <a:gs pos="0">
+              <a:schemeClr val="phClr">
+                <a:lumMod val="110000"/>
+                <a:satMod val="105000"/>
+                <a:tint val="67000"/>
+              </a:schemeClr>
+            </a:gs>
+            <a:gs pos="50000">
+              <a:schemeClr val="phClr">
+                <a:lumMod val="105000"/>
+                <a:satMod val="103000"/>
+                <a:tint val="73000"/>
+              </a:schemeClr>
+            </a:gs>
+            <a:gs pos="100000">
+              <a:schemeClr val="phClr">
+                <a:lumMod val="105000"/>
+                <a:satMod val="109000"/>
+                <a:tint val="81000"/>
+              </a:schemeClr>
+            </a:gs>
+          </a:gsLst>
+          <a:lin ang="5400000" scaled="0"/>
+        </a:gradFill>
+        <a:gradFill rotWithShape="1">
+          <a:gsLst>
+            <a:gs pos="0">
+              <a:schemeClr val="phClr">
+                <a:satMod val="103000"/>
+                <a:lumMod val="102000"/>
+                <a:tint val="94000"/>
+              </a:schemeClr>
+            </a:gs>
+            <a:gs pos="50000">
+              <a:schemeClr val="phClr">
+                <a:satMod val="110000"/>
+                <a:lumMod val="100000"/>
+                <a:shade val="100000"/>
+              </a:schemeClr>
+            </a:gs>
+            <a:gs pos="100000">
+              <a:schemeClr val="phClr">
+                <a:lumMod val="99000"/>
+                <a:satMod val="120000"/>
+                <a:shade val="78000"/>
+              </a:schemeClr>
+            </a:gs>
+          </a:gsLst>
+          <a:lin ang="5400000" scaled="0"/>
+        </a:gradFill>
+      </a:fillStyleLst>
+      <a:lnStyleLst>
+        <a:ln w="6350" cap="flat" cmpd="sng" algn="ctr">
+          <a:solidFill>
+            <a:schemeClr val="phClr"/>
+          </a:solidFill>
+          <a:prstDash val="solid"/>
+          <a:miter lim="800000"/>
+        </a:ln>
+        <a:ln w="12700" cap="flat" cmpd="sng" algn="ctr">
+          <a:solidFill>
+            <a:schemeClr val="phClr"/>
+          </a:solidFill>
+          <a:prstDash val="solid"/>
+          <a:miter lim="800000"/>
+        </a:ln>
+        <a:ln w="19050" cap="flat" cmpd="sng" algn="ctr">
+          <a:solidFill>
+            <a:schemeClr val="phClr"/>
+          </a:solidFill>
+          <a:prstDash val="solid"/>
+          <a:miter lim="800000"/>
+        </a:ln>
+      </a:lnStyleLst>
+      <a:effectStyleLst>
+        <a:effectStyle>
+          <a:effectLst/>
+        </a:effectStyle>
+        <a:effectStyle>
+          <a:effectLst/>
+        </a:effectStyle>
+        <a:effectStyle>
+          <a:effectLst>
+            <a:outerShdw blurRad="57150" dist="19050" dir="5400000" algn="ctr" rotWithShape="0">
+              <a:srgbClr val="000000">
+                <a:alpha val="63000"/>
+              </a:srgbClr>
+            </a:outerShdw>
+          </a:effectLst>
+        </a:effectStyle>
+      </a:effectStyleLst>
+      <a:bgFillStyleLst>
+        <a:solidFill>
+          <a:schemeClr val="phClr"/>
+        </a:solidFill>
+        <a:solidFill>
+          <a:schemeClr val="phClr">
+            <a:tint val="95000"/>
+            <a:satMod val="170000"/>
+          </a:schemeClr>
+        </a:solidFill>
+        <a:gradFill rotWithShape="1">
+          <a:gsLst>
+            <a:gs pos="0">
+              <a:schemeClr val="phClr">
+                <a:tint val="93000"/>
+                <a:satMod val="150000"/>
+                <a:shade val="98000"/>
+                <a:lumMod val="102000"/>
+              </a:schemeClr>
+            </a:gs>
+            <a:gs pos="50000">
+              <a:schemeClr val="phClr">
+                <a:tint val="98000"/>
+                <a:satMod val="130000"/>
+                <a:shade val="90000"/>
+                <a:lumMod val="103000"/>
+              </a:schemeClr>
+            </a:gs>
+            <a:gs pos="100000">
+              <a:schemeClr val="phClr">
+                <a:shade val="63000"/>
+                <a:satMod val="120000"/>
+              </a:schemeClr>
+            </a:gs>
+          </a:gsLst>
+          <a:lin ang="5400000" scaled="0"/>
+        </a:gradFill>
+      </a:bgFillStyleLst>
+    </a:fmtScheme>
+  </a:themeElements>
+  <a:objectDefaults/>
+  <a:extraClrSchemeLst/>
+  <a:extLst>
+    <a:ext uri="{05A4C25C-085E-4340-85A3-A5531E510DB2}">
+      <thm15:themeFamily xmlns:thm15="http://schemas.microsoft.com/office/thememl/2012/main" name="Office Theme" id="{62F939B6-93AF-4DB8-9C6B-D6C7DFDC589F}" vid="{4A3C46E8-61CC-4603-A589-7422A47A8E4A}"/>
+    </a:ext>
+  </a:extLst>
+</a:theme>
 </file>
--- a/モデリング/ポスター類/プレゼン.pptx
+++ b/モデリング/ポスター類/プレゼン.pptx
@@ -5,12 +5,13 @@
     <p:sldMasterId id="2147483648" r:id="rId1"/>
   </p:sldMasterIdLst>
   <p:notesMasterIdLst>
-    <p:notesMasterId r:id="rId5"/>
+    <p:notesMasterId r:id="rId6"/>
   </p:notesMasterIdLst>
   <p:sldIdLst>
     <p:sldId id="256" r:id="rId2"/>
     <p:sldId id="257" r:id="rId3"/>
     <p:sldId id="258" r:id="rId4"/>
+    <p:sldId id="259" r:id="rId5"/>
   </p:sldIdLst>
   <p:sldSz cx="12192000" cy="6858000"/>
   <p:notesSz cx="6858000" cy="9144000"/>
@@ -199,7 +200,7 @@
           <a:p>
             <a:fld id="{D67AA051-A42D-4CB0-8761-895C68CE1059}" type="datetimeFigureOut">
               <a:rPr kumimoji="1" lang="ja-JP" altLang="en-US" smtClean="0"/>
-              <a:t>2025/8/11</a:t>
+              <a:t>2026/1/13</a:t>
             </a:fld>
             <a:endParaRPr kumimoji="1" lang="ja-JP" altLang="en-US"/>
           </a:p>
@@ -698,7 +699,7 @@
           <a:p>
             <a:fld id="{D30F02CC-316E-46E0-B601-BFB73628A698}" type="datetimeFigureOut">
               <a:rPr kumimoji="1" lang="ja-JP" altLang="en-US" smtClean="0"/>
-              <a:t>2025/8/11</a:t>
+              <a:t>2026/1/13</a:t>
             </a:fld>
             <a:endParaRPr kumimoji="1" lang="ja-JP" altLang="en-US"/>
           </a:p>
@@ -928,7 +929,7 @@
           <a:p>
             <a:fld id="{D30F02CC-316E-46E0-B601-BFB73628A698}" type="datetimeFigureOut">
               <a:rPr kumimoji="1" lang="ja-JP" altLang="en-US" smtClean="0"/>
-              <a:t>2025/8/11</a:t>
+              <a:t>2026/1/13</a:t>
             </a:fld>
             <a:endParaRPr kumimoji="1" lang="ja-JP" altLang="en-US"/>
           </a:p>
@@ -1168,7 +1169,7 @@
           <a:p>
             <a:fld id="{D30F02CC-316E-46E0-B601-BFB73628A698}" type="datetimeFigureOut">
               <a:rPr kumimoji="1" lang="ja-JP" altLang="en-US" smtClean="0"/>
-              <a:t>2025/8/11</a:t>
+              <a:t>2026/1/13</a:t>
             </a:fld>
             <a:endParaRPr kumimoji="1" lang="ja-JP" altLang="en-US"/>
           </a:p>
@@ -1398,7 +1399,7 @@
           <a:p>
             <a:fld id="{D30F02CC-316E-46E0-B601-BFB73628A698}" type="datetimeFigureOut">
               <a:rPr kumimoji="1" lang="ja-JP" altLang="en-US" smtClean="0"/>
-              <a:t>2025/8/11</a:t>
+              <a:t>2026/1/13</a:t>
             </a:fld>
             <a:endParaRPr kumimoji="1" lang="ja-JP" altLang="en-US"/>
           </a:p>
@@ -1673,7 +1674,7 @@
           <a:p>
             <a:fld id="{D30F02CC-316E-46E0-B601-BFB73628A698}" type="datetimeFigureOut">
               <a:rPr kumimoji="1" lang="ja-JP" altLang="en-US" smtClean="0"/>
-              <a:t>2025/8/11</a:t>
+              <a:t>2026/1/13</a:t>
             </a:fld>
             <a:endParaRPr kumimoji="1" lang="ja-JP" altLang="en-US"/>
           </a:p>
@@ -2002,7 +2003,7 @@
           <a:p>
             <a:fld id="{D30F02CC-316E-46E0-B601-BFB73628A698}" type="datetimeFigureOut">
               <a:rPr kumimoji="1" lang="ja-JP" altLang="en-US" smtClean="0"/>
-              <a:t>2025/8/11</a:t>
+              <a:t>2026/1/13</a:t>
             </a:fld>
             <a:endParaRPr kumimoji="1" lang="ja-JP" altLang="en-US"/>
           </a:p>
@@ -2478,7 +2479,7 @@
           <a:p>
             <a:fld id="{D30F02CC-316E-46E0-B601-BFB73628A698}" type="datetimeFigureOut">
               <a:rPr kumimoji="1" lang="ja-JP" altLang="en-US" smtClean="0"/>
-              <a:t>2025/8/11</a:t>
+              <a:t>2026/1/13</a:t>
             </a:fld>
             <a:endParaRPr kumimoji="1" lang="ja-JP" altLang="en-US"/>
           </a:p>
@@ -2619,7 +2620,7 @@
           <a:p>
             <a:fld id="{D30F02CC-316E-46E0-B601-BFB73628A698}" type="datetimeFigureOut">
               <a:rPr kumimoji="1" lang="ja-JP" altLang="en-US" smtClean="0"/>
-              <a:t>2025/8/11</a:t>
+              <a:t>2026/1/13</a:t>
             </a:fld>
             <a:endParaRPr kumimoji="1" lang="ja-JP" altLang="en-US"/>
           </a:p>
@@ -2732,7 +2733,7 @@
           <a:p>
             <a:fld id="{D30F02CC-316E-46E0-B601-BFB73628A698}" type="datetimeFigureOut">
               <a:rPr kumimoji="1" lang="ja-JP" altLang="en-US" smtClean="0"/>
-              <a:t>2025/8/11</a:t>
+              <a:t>2026/1/13</a:t>
             </a:fld>
             <a:endParaRPr kumimoji="1" lang="ja-JP" altLang="en-US"/>
           </a:p>
@@ -3075,7 +3076,7 @@
           <a:p>
             <a:fld id="{D30F02CC-316E-46E0-B601-BFB73628A698}" type="datetimeFigureOut">
               <a:rPr kumimoji="1" lang="ja-JP" altLang="en-US" smtClean="0"/>
-              <a:t>2025/8/11</a:t>
+              <a:t>2026/1/13</a:t>
             </a:fld>
             <a:endParaRPr kumimoji="1" lang="ja-JP" altLang="en-US"/>
           </a:p>
@@ -3363,7 +3364,7 @@
           <a:p>
             <a:fld id="{D30F02CC-316E-46E0-B601-BFB73628A698}" type="datetimeFigureOut">
               <a:rPr kumimoji="1" lang="ja-JP" altLang="en-US" smtClean="0"/>
-              <a:t>2025/8/11</a:t>
+              <a:t>2026/1/13</a:t>
             </a:fld>
             <a:endParaRPr kumimoji="1" lang="ja-JP" altLang="en-US"/>
           </a:p>
@@ -3636,7 +3637,7 @@
           <a:p>
             <a:fld id="{D30F02CC-316E-46E0-B601-BFB73628A698}" type="datetimeFigureOut">
               <a:rPr kumimoji="1" lang="ja-JP" altLang="en-US" smtClean="0"/>
-              <a:t>2025/8/11</a:t>
+              <a:t>2026/1/13</a:t>
             </a:fld>
             <a:endParaRPr kumimoji="1" lang="ja-JP" altLang="en-US"/>
           </a:p>
@@ -6077,6 +6078,216 @@
     <p:extLst>
       <p:ext uri="{BB962C8B-B14F-4D97-AF65-F5344CB8AC3E}">
         <p14:creationId xmlns:p14="http://schemas.microsoft.com/office/powerpoint/2010/main" val="862798005"/>
+      </p:ext>
+    </p:extLst>
+  </p:cSld>
+  <p:clrMapOvr>
+    <a:masterClrMapping/>
+  </p:clrMapOvr>
+</p:sld>
+</file>
+
+<file path=ppt/slides/slide4.xml><?xml version="1.0" encoding="utf-8"?>
+<p:sld xmlns:a="http://schemas.openxmlformats.org/drawingml/2006/main" xmlns:r="http://schemas.openxmlformats.org/officeDocument/2006/relationships" xmlns:p="http://schemas.openxmlformats.org/presentationml/2006/main">
+  <p:cSld>
+    <p:spTree>
+      <p:nvGrpSpPr>
+        <p:cNvPr id="1" name="">
+          <a:extLst>
+            <a:ext uri="{FF2B5EF4-FFF2-40B4-BE49-F238E27FC236}">
+              <a16:creationId xmlns:a16="http://schemas.microsoft.com/office/drawing/2014/main" id="{C40E20C4-ACA0-C323-925E-B3FC8ECEA86C}"/>
+            </a:ext>
+          </a:extLst>
+        </p:cNvPr>
+        <p:cNvGrpSpPr/>
+        <p:nvPr/>
+      </p:nvGrpSpPr>
+      <p:grpSpPr>
+        <a:xfrm>
+          <a:off x="0" y="0"/>
+          <a:ext cx="0" cy="0"/>
+          <a:chOff x="0" y="0"/>
+          <a:chExt cx="0" cy="0"/>
+        </a:xfrm>
+      </p:grpSpPr>
+      <p:pic>
+        <p:nvPicPr>
+          <p:cNvPr id="3" name="Picture 2">
+            <a:extLst>
+              <a:ext uri="{FF2B5EF4-FFF2-40B4-BE49-F238E27FC236}">
+                <a16:creationId xmlns:a16="http://schemas.microsoft.com/office/drawing/2014/main" id="{E534ACD8-E7A9-1B7C-ABA1-2C96EB562BA9}"/>
+              </a:ext>
+            </a:extLst>
+          </p:cNvPr>
+          <p:cNvPicPr>
+            <a:picLocks noChangeAspect="1"/>
+          </p:cNvPicPr>
+          <p:nvPr/>
+        </p:nvPicPr>
+        <p:blipFill>
+          <a:blip r:embed="rId2">
+            <a:extLst>
+              <a:ext uri="{BEBA8EAE-BF5A-486C-A8C5-ECC9F3942E4B}">
+                <a14:imgProps xmlns:a14="http://schemas.microsoft.com/office/drawing/2010/main">
+                  <a14:imgLayer r:embed="rId3">
+                    <a14:imgEffect>
+                      <a14:brightnessContrast bright="20000"/>
+                    </a14:imgEffect>
+                  </a14:imgLayer>
+                </a14:imgProps>
+              </a:ext>
+            </a:extLst>
+          </a:blip>
+          <a:stretch>
+            <a:fillRect/>
+          </a:stretch>
+        </p:blipFill>
+        <p:spPr>
+          <a:xfrm>
+            <a:off x="22371" y="990600"/>
+            <a:ext cx="6073629" cy="4876800"/>
+          </a:xfrm>
+          <a:prstGeom prst="rect">
+            <a:avLst/>
+          </a:prstGeom>
+        </p:spPr>
+      </p:pic>
+      <p:sp>
+        <p:nvSpPr>
+          <p:cNvPr id="7" name="Rectangle 6">
+            <a:extLst>
+              <a:ext uri="{FF2B5EF4-FFF2-40B4-BE49-F238E27FC236}">
+                <a16:creationId xmlns:a16="http://schemas.microsoft.com/office/drawing/2014/main" id="{85AAED65-ADDE-EC0C-76E0-1B29D0DB9A7C}"/>
+              </a:ext>
+            </a:extLst>
+          </p:cNvPr>
+          <p:cNvSpPr/>
+          <p:nvPr/>
+        </p:nvSpPr>
+        <p:spPr>
+          <a:xfrm>
+            <a:off x="4361577" y="1700513"/>
+            <a:ext cx="4224760" cy="4166887"/>
+          </a:xfrm>
+          <a:prstGeom prst="rect">
+            <a:avLst/>
+          </a:prstGeom>
+          <a:gradFill flip="none" rotWithShape="1">
+            <a:gsLst>
+              <a:gs pos="31000">
+                <a:schemeClr val="tx1">
+                  <a:alpha val="50000"/>
+                </a:schemeClr>
+              </a:gs>
+              <a:gs pos="100000">
+                <a:schemeClr val="tx1">
+                  <a:alpha val="0"/>
+                </a:schemeClr>
+              </a:gs>
+            </a:gsLst>
+            <a:path path="circle">
+              <a:fillToRect l="50000" t="50000" r="50000" b="50000"/>
+            </a:path>
+            <a:tileRect/>
+          </a:gradFill>
+          <a:ln>
+            <a:noFill/>
+          </a:ln>
+        </p:spPr>
+        <p:style>
+          <a:lnRef idx="2">
+            <a:schemeClr val="accent1">
+              <a:shade val="15000"/>
+            </a:schemeClr>
+          </a:lnRef>
+          <a:fillRef idx="1">
+            <a:schemeClr val="accent1"/>
+          </a:fillRef>
+          <a:effectRef idx="0">
+            <a:schemeClr val="accent1"/>
+          </a:effectRef>
+          <a:fontRef idx="minor">
+            <a:schemeClr val="lt1"/>
+          </a:fontRef>
+        </p:style>
+        <p:txBody>
+          <a:bodyPr rtlCol="0" anchor="ctr"/>
+          <a:lstStyle/>
+          <a:p>
+            <a:pPr algn="ctr"/>
+            <a:endParaRPr kumimoji="1" lang="ja-JP" altLang="en-US"/>
+          </a:p>
+        </p:txBody>
+      </p:sp>
+      <p:sp>
+        <p:nvSpPr>
+          <p:cNvPr id="9" name="Rectangle 8">
+            <a:extLst>
+              <a:ext uri="{FF2B5EF4-FFF2-40B4-BE49-F238E27FC236}">
+                <a16:creationId xmlns:a16="http://schemas.microsoft.com/office/drawing/2014/main" id="{630113CA-41A6-4ADD-36ED-94ACD36B5BCE}"/>
+              </a:ext>
+            </a:extLst>
+          </p:cNvPr>
+          <p:cNvSpPr/>
+          <p:nvPr/>
+        </p:nvSpPr>
+        <p:spPr>
+          <a:xfrm>
+            <a:off x="8586337" y="1700512"/>
+            <a:ext cx="4224760" cy="4166887"/>
+          </a:xfrm>
+          <a:prstGeom prst="rect">
+            <a:avLst/>
+          </a:prstGeom>
+          <a:gradFill flip="none" rotWithShape="1">
+            <a:gsLst>
+              <a:gs pos="15000">
+                <a:schemeClr val="tx1">
+                  <a:alpha val="50000"/>
+                </a:schemeClr>
+              </a:gs>
+              <a:gs pos="0">
+                <a:schemeClr val="tx1">
+                  <a:alpha val="0"/>
+                </a:schemeClr>
+              </a:gs>
+            </a:gsLst>
+            <a:lin ang="5400000" scaled="0"/>
+            <a:tileRect/>
+          </a:gradFill>
+          <a:ln>
+            <a:noFill/>
+          </a:ln>
+        </p:spPr>
+        <p:style>
+          <a:lnRef idx="2">
+            <a:schemeClr val="accent1">
+              <a:shade val="15000"/>
+            </a:schemeClr>
+          </a:lnRef>
+          <a:fillRef idx="1">
+            <a:schemeClr val="accent1"/>
+          </a:fillRef>
+          <a:effectRef idx="0">
+            <a:schemeClr val="accent1"/>
+          </a:effectRef>
+          <a:fontRef idx="minor">
+            <a:schemeClr val="lt1"/>
+          </a:fontRef>
+        </p:style>
+        <p:txBody>
+          <a:bodyPr rtlCol="0" anchor="ctr"/>
+          <a:lstStyle/>
+          <a:p>
+            <a:pPr algn="ctr"/>
+            <a:endParaRPr kumimoji="1" lang="ja-JP" altLang="en-US"/>
+          </a:p>
+        </p:txBody>
+      </p:sp>
+    </p:spTree>
+    <p:extLst>
+      <p:ext uri="{BB962C8B-B14F-4D97-AF65-F5344CB8AC3E}">
+        <p14:creationId xmlns:p14="http://schemas.microsoft.com/office/powerpoint/2010/main" val="3639601133"/>
       </p:ext>
     </p:extLst>
   </p:cSld>
